--- a/chapter_05/figures/rainfall_based_ff_verif_overall_scores.pptx
+++ b/chapter_05/figures/rainfall_based_ff_verif_overall_scores.pptx
@@ -115,7 +115,7 @@
 <file path=ppt/revisionInfo.xml><?xml version="1.0" encoding="utf-8"?>
 <p1510:revInfo xmlns:a="http://schemas.openxmlformats.org/drawingml/2006/main" xmlns:r="http://schemas.openxmlformats.org/officeDocument/2006/relationships" xmlns:p1510="http://schemas.microsoft.com/office/powerpoint/2015/10/main">
   <p1510:revLst>
-    <p1510:client id="{81937EDE-744E-40B0-955C-4DD4FF246C01}" v="40" dt="2025-05-24T16:23:20.884"/>
+    <p1510:client id="{9D3BEDD0-040A-4BF7-ABF9-D0FF9D49D355}" v="4" dt="2026-01-26T21:39:49.021"/>
   </p1510:revLst>
 </p1510:revInfo>
 </file>
@@ -123,148 +123,140 @@
 <file path=ppt/changesInfos/changesInfo1.xml><?xml version="1.0" encoding="utf-8"?>
 <pc:chgInfo xmlns:a="http://schemas.openxmlformats.org/drawingml/2006/main" xmlns:r="http://schemas.openxmlformats.org/officeDocument/2006/relationships" xmlns:ac="http://schemas.microsoft.com/office/drawing/2013/main/command" xmlns:pc="http://schemas.microsoft.com/office/powerpoint/2013/main/command">
   <pc:docChgLst>
-    <pc:chgData name="Fatima Pillosu" userId="a6295d4dc9e22643" providerId="LiveId" clId="{81937EDE-744E-40B0-955C-4DD4FF246C01}"/>
-    <pc:docChg chg="undo custSel modSld">
-      <pc:chgData name="Fatima Pillosu" userId="a6295d4dc9e22643" providerId="LiveId" clId="{81937EDE-744E-40B0-955C-4DD4FF246C01}" dt="2025-05-25T07:18:02.409" v="1191" actId="208"/>
+    <pc:chgData name="Fatima Pillosu" userId="a6295d4dc9e22643" providerId="LiveId" clId="{87453732-75AC-4426-B5D3-B7C69C2D4F54}"/>
+    <pc:docChg chg="custSel modSld">
+      <pc:chgData name="Fatima Pillosu" userId="a6295d4dc9e22643" providerId="LiveId" clId="{87453732-75AC-4426-B5D3-B7C69C2D4F54}" dt="2026-01-26T21:42:02.411" v="302" actId="166"/>
       <pc:docMkLst>
         <pc:docMk/>
       </pc:docMkLst>
       <pc:sldChg chg="addSp delSp modSp mod">
-        <pc:chgData name="Fatima Pillosu" userId="a6295d4dc9e22643" providerId="LiveId" clId="{81937EDE-744E-40B0-955C-4DD4FF246C01}" dt="2025-05-25T07:18:02.409" v="1191" actId="208"/>
+        <pc:chgData name="Fatima Pillosu" userId="a6295d4dc9e22643" providerId="LiveId" clId="{87453732-75AC-4426-B5D3-B7C69C2D4F54}" dt="2026-01-26T21:42:02.411" v="302" actId="166"/>
         <pc:sldMkLst>
           <pc:docMk/>
           <pc:sldMk cId="4122425894" sldId="256"/>
         </pc:sldMkLst>
-        <pc:spChg chg="add mod">
-          <ac:chgData name="Fatima Pillosu" userId="a6295d4dc9e22643" providerId="LiveId" clId="{81937EDE-744E-40B0-955C-4DD4FF246C01}" dt="2025-05-24T16:22:15.304" v="1111" actId="1037"/>
+        <pc:spChg chg="mod">
+          <ac:chgData name="Fatima Pillosu" userId="a6295d4dc9e22643" providerId="LiveId" clId="{87453732-75AC-4426-B5D3-B7C69C2D4F54}" dt="2026-01-26T21:37:23.138" v="164" actId="1037"/>
           <ac:spMkLst>
             <pc:docMk/>
             <pc:sldMk cId="4122425894" sldId="256"/>
             <ac:spMk id="4" creationId="{4CFD56CB-2BA5-3C24-4274-7CC3E331D223}"/>
           </ac:spMkLst>
         </pc:spChg>
-        <pc:spChg chg="add mod">
-          <ac:chgData name="Fatima Pillosu" userId="a6295d4dc9e22643" providerId="LiveId" clId="{81937EDE-744E-40B0-955C-4DD4FF246C01}" dt="2025-05-24T16:22:15.304" v="1111" actId="1037"/>
+        <pc:spChg chg="mod">
+          <ac:chgData name="Fatima Pillosu" userId="a6295d4dc9e22643" providerId="LiveId" clId="{87453732-75AC-4426-B5D3-B7C69C2D4F54}" dt="2026-01-26T21:38:36.145" v="227" actId="1035"/>
           <ac:spMkLst>
             <pc:docMk/>
             <pc:sldMk cId="4122425894" sldId="256"/>
             <ac:spMk id="5" creationId="{F9DEE6FF-D6AA-D3A4-1B8F-F892AE389397}"/>
           </ac:spMkLst>
         </pc:spChg>
-        <pc:spChg chg="add mod">
-          <ac:chgData name="Fatima Pillosu" userId="a6295d4dc9e22643" providerId="LiveId" clId="{81937EDE-744E-40B0-955C-4DD4FF246C01}" dt="2025-05-24T16:22:15.304" v="1111" actId="1037"/>
+        <pc:spChg chg="mod">
+          <ac:chgData name="Fatima Pillosu" userId="a6295d4dc9e22643" providerId="LiveId" clId="{87453732-75AC-4426-B5D3-B7C69C2D4F54}" dt="2026-01-26T21:38:36.145" v="227" actId="1035"/>
           <ac:spMkLst>
             <pc:docMk/>
             <pc:sldMk cId="4122425894" sldId="256"/>
             <ac:spMk id="6" creationId="{FD71727C-9004-3A14-698D-77D17BE5D7EC}"/>
           </ac:spMkLst>
         </pc:spChg>
-        <pc:spChg chg="add mod">
-          <ac:chgData name="Fatima Pillosu" userId="a6295d4dc9e22643" providerId="LiveId" clId="{81937EDE-744E-40B0-955C-4DD4FF246C01}" dt="2025-05-24T16:22:15.304" v="1111" actId="1037"/>
+        <pc:spChg chg="mod">
+          <ac:chgData name="Fatima Pillosu" userId="a6295d4dc9e22643" providerId="LiveId" clId="{87453732-75AC-4426-B5D3-B7C69C2D4F54}" dt="2026-01-26T21:37:23.138" v="164" actId="1037"/>
           <ac:spMkLst>
             <pc:docMk/>
             <pc:sldMk cId="4122425894" sldId="256"/>
             <ac:spMk id="7" creationId="{AC24FE6F-76E9-183F-E2C2-8F82EB8E41D2}"/>
           </ac:spMkLst>
         </pc:spChg>
-        <pc:spChg chg="add del mod">
-          <ac:chgData name="Fatima Pillosu" userId="a6295d4dc9e22643" providerId="LiveId" clId="{81937EDE-744E-40B0-955C-4DD4FF246C01}" dt="2025-05-24T15:31:47.897" v="735" actId="21"/>
-          <ac:spMkLst>
-            <pc:docMk/>
-            <pc:sldMk cId="4122425894" sldId="256"/>
-            <ac:spMk id="8" creationId="{0A22D3D2-33E3-536C-ED6E-DA2D0B55AFCA}"/>
-          </ac:spMkLst>
-        </pc:spChg>
-        <pc:spChg chg="add mod">
-          <ac:chgData name="Fatima Pillosu" userId="a6295d4dc9e22643" providerId="LiveId" clId="{81937EDE-744E-40B0-955C-4DD4FF246C01}" dt="2025-05-24T16:22:15.304" v="1111" actId="1037"/>
+        <pc:spChg chg="mod">
+          <ac:chgData name="Fatima Pillosu" userId="a6295d4dc9e22643" providerId="LiveId" clId="{87453732-75AC-4426-B5D3-B7C69C2D4F54}" dt="2026-01-26T21:37:23.138" v="164" actId="1037"/>
           <ac:spMkLst>
             <pc:docMk/>
             <pc:sldMk cId="4122425894" sldId="256"/>
             <ac:spMk id="8" creationId="{83DA8E06-AB13-6BC9-F39C-691A6BB7E371}"/>
           </ac:spMkLst>
         </pc:spChg>
-        <pc:spChg chg="add mod">
-          <ac:chgData name="Fatima Pillosu" userId="a6295d4dc9e22643" providerId="LiveId" clId="{81937EDE-744E-40B0-955C-4DD4FF246C01}" dt="2025-05-24T16:22:15.304" v="1111" actId="1037"/>
+        <pc:spChg chg="mod">
+          <ac:chgData name="Fatima Pillosu" userId="a6295d4dc9e22643" providerId="LiveId" clId="{87453732-75AC-4426-B5D3-B7C69C2D4F54}" dt="2026-01-26T21:37:23.138" v="164" actId="1037"/>
           <ac:spMkLst>
             <pc:docMk/>
             <pc:sldMk cId="4122425894" sldId="256"/>
             <ac:spMk id="9" creationId="{5EA79853-4A16-E2A1-24AC-7446A89D913D}"/>
           </ac:spMkLst>
         </pc:spChg>
-        <pc:spChg chg="add mod">
-          <ac:chgData name="Fatima Pillosu" userId="a6295d4dc9e22643" providerId="LiveId" clId="{81937EDE-744E-40B0-955C-4DD4FF246C01}" dt="2025-05-24T16:22:15.304" v="1111" actId="1037"/>
+        <pc:spChg chg="mod">
+          <ac:chgData name="Fatima Pillosu" userId="a6295d4dc9e22643" providerId="LiveId" clId="{87453732-75AC-4426-B5D3-B7C69C2D4F54}" dt="2026-01-26T21:38:36.145" v="227" actId="1035"/>
           <ac:spMkLst>
             <pc:docMk/>
             <pc:sldMk cId="4122425894" sldId="256"/>
             <ac:spMk id="10" creationId="{5AFED677-38B3-0F2F-3E5C-27D03445D9B1}"/>
           </ac:spMkLst>
         </pc:spChg>
-        <pc:spChg chg="add del mod">
-          <ac:chgData name="Fatima Pillosu" userId="a6295d4dc9e22643" providerId="LiveId" clId="{81937EDE-744E-40B0-955C-4DD4FF246C01}" dt="2025-05-24T15:58:28.455" v="846" actId="478"/>
+        <pc:spChg chg="add mod">
+          <ac:chgData name="Fatima Pillosu" userId="a6295d4dc9e22643" providerId="LiveId" clId="{87453732-75AC-4426-B5D3-B7C69C2D4F54}" dt="2026-01-26T21:38:36.145" v="227" actId="1035"/>
           <ac:spMkLst>
             <pc:docMk/>
             <pc:sldMk cId="4122425894" sldId="256"/>
-            <ac:spMk id="11" creationId="{B6A13621-04BA-1821-9CCD-CB0576A196ED}"/>
+            <ac:spMk id="11" creationId="{AED0EFEF-B164-5D7D-C462-3BA20FE07E01}"/>
           </ac:spMkLst>
         </pc:spChg>
-        <pc:spChg chg="add mod">
-          <ac:chgData name="Fatima Pillosu" userId="a6295d4dc9e22643" providerId="LiveId" clId="{81937EDE-744E-40B0-955C-4DD4FF246C01}" dt="2025-05-24T16:22:15.304" v="1111" actId="1037"/>
+        <pc:spChg chg="mod">
+          <ac:chgData name="Fatima Pillosu" userId="a6295d4dc9e22643" providerId="LiveId" clId="{87453732-75AC-4426-B5D3-B7C69C2D4F54}" dt="2026-01-26T21:38:36.145" v="227" actId="1035"/>
           <ac:spMkLst>
             <pc:docMk/>
             <pc:sldMk cId="4122425894" sldId="256"/>
             <ac:spMk id="12" creationId="{6F5546F9-CB50-DD52-CC62-D6D659D21FB0}"/>
           </ac:spMkLst>
         </pc:spChg>
-        <pc:spChg chg="add del mod">
-          <ac:chgData name="Fatima Pillosu" userId="a6295d4dc9e22643" providerId="LiveId" clId="{81937EDE-744E-40B0-955C-4DD4FF246C01}" dt="2025-05-24T15:59:04.695" v="853" actId="478"/>
+        <pc:spChg chg="add mod">
+          <ac:chgData name="Fatima Pillosu" userId="a6295d4dc9e22643" providerId="LiveId" clId="{87453732-75AC-4426-B5D3-B7C69C2D4F54}" dt="2026-01-26T21:38:36.145" v="227" actId="1035"/>
           <ac:spMkLst>
             <pc:docMk/>
             <pc:sldMk cId="4122425894" sldId="256"/>
-            <ac:spMk id="13" creationId="{E25D8D7F-AEFA-565C-5C8A-D08DF39F4D6B}"/>
+            <ac:spMk id="13" creationId="{A9FFF771-21B0-7DFE-70D9-E959CBD2B2D8}"/>
           </ac:spMkLst>
         </pc:spChg>
-        <pc:spChg chg="add mod">
-          <ac:chgData name="Fatima Pillosu" userId="a6295d4dc9e22643" providerId="LiveId" clId="{81937EDE-744E-40B0-955C-4DD4FF246C01}" dt="2025-05-24T16:22:15.304" v="1111" actId="1037"/>
+        <pc:spChg chg="mod">
+          <ac:chgData name="Fatima Pillosu" userId="a6295d4dc9e22643" providerId="LiveId" clId="{87453732-75AC-4426-B5D3-B7C69C2D4F54}" dt="2026-01-26T21:38:36.145" v="227" actId="1035"/>
           <ac:spMkLst>
             <pc:docMk/>
             <pc:sldMk cId="4122425894" sldId="256"/>
             <ac:spMk id="14" creationId="{22FA3513-546F-C72F-3736-768F809B9239}"/>
           </ac:spMkLst>
         </pc:spChg>
-        <pc:spChg chg="add mod">
-          <ac:chgData name="Fatima Pillosu" userId="a6295d4dc9e22643" providerId="LiveId" clId="{81937EDE-744E-40B0-955C-4DD4FF246C01}" dt="2025-05-24T16:22:15.304" v="1111" actId="1037"/>
+        <pc:spChg chg="mod">
+          <ac:chgData name="Fatima Pillosu" userId="a6295d4dc9e22643" providerId="LiveId" clId="{87453732-75AC-4426-B5D3-B7C69C2D4F54}" dt="2026-01-26T21:38:36.145" v="227" actId="1035"/>
           <ac:spMkLst>
             <pc:docMk/>
             <pc:sldMk cId="4122425894" sldId="256"/>
             <ac:spMk id="15" creationId="{CB5C5868-E424-7CD4-5CDE-B799844A885B}"/>
           </ac:spMkLst>
         </pc:spChg>
-        <pc:spChg chg="add mod">
-          <ac:chgData name="Fatima Pillosu" userId="a6295d4dc9e22643" providerId="LiveId" clId="{81937EDE-744E-40B0-955C-4DD4FF246C01}" dt="2025-05-24T16:22:15.304" v="1111" actId="1037"/>
+        <pc:spChg chg="mod">
+          <ac:chgData name="Fatima Pillosu" userId="a6295d4dc9e22643" providerId="LiveId" clId="{87453732-75AC-4426-B5D3-B7C69C2D4F54}" dt="2026-01-26T21:38:36.145" v="227" actId="1035"/>
           <ac:spMkLst>
             <pc:docMk/>
             <pc:sldMk cId="4122425894" sldId="256"/>
             <ac:spMk id="16" creationId="{680856A1-FEA5-20B4-16FD-C9DA06B7AA9C}"/>
           </ac:spMkLst>
         </pc:spChg>
-        <pc:spChg chg="add mod">
-          <ac:chgData name="Fatima Pillosu" userId="a6295d4dc9e22643" providerId="LiveId" clId="{81937EDE-744E-40B0-955C-4DD4FF246C01}" dt="2025-05-24T16:22:54.096" v="1136" actId="1036"/>
+        <pc:spChg chg="mod">
+          <ac:chgData name="Fatima Pillosu" userId="a6295d4dc9e22643" providerId="LiveId" clId="{87453732-75AC-4426-B5D3-B7C69C2D4F54}" dt="2026-01-26T21:41:45.762" v="270" actId="1036"/>
           <ac:spMkLst>
             <pc:docMk/>
             <pc:sldMk cId="4122425894" sldId="256"/>
             <ac:spMk id="17" creationId="{9942BCEB-1125-4CA0-7CD8-6A4063077148}"/>
           </ac:spMkLst>
         </pc:spChg>
-        <pc:spChg chg="add mod">
-          <ac:chgData name="Fatima Pillosu" userId="a6295d4dc9e22643" providerId="LiveId" clId="{81937EDE-744E-40B0-955C-4DD4FF246C01}" dt="2025-05-24T16:22:28.969" v="1121" actId="1038"/>
+        <pc:spChg chg="mod">
+          <ac:chgData name="Fatima Pillosu" userId="a6295d4dc9e22643" providerId="LiveId" clId="{87453732-75AC-4426-B5D3-B7C69C2D4F54}" dt="2026-01-26T21:36:00.418" v="103" actId="164"/>
           <ac:spMkLst>
             <pc:docMk/>
             <pc:sldMk cId="4122425894" sldId="256"/>
             <ac:spMk id="20" creationId="{A774BF42-470D-0D2F-0E8F-51C3D1A1FEBE}"/>
           </ac:spMkLst>
         </pc:spChg>
-        <pc:spChg chg="add mod">
-          <ac:chgData name="Fatima Pillosu" userId="a6295d4dc9e22643" providerId="LiveId" clId="{81937EDE-744E-40B0-955C-4DD4FF246C01}" dt="2025-05-24T16:23:42.622" v="1163" actId="20577"/>
+        <pc:spChg chg="mod">
+          <ac:chgData name="Fatima Pillosu" userId="a6295d4dc9e22643" providerId="LiveId" clId="{87453732-75AC-4426-B5D3-B7C69C2D4F54}" dt="2026-01-26T21:34:02.936" v="54" actId="1036"/>
           <ac:spMkLst>
             <pc:docMk/>
             <pc:sldMk cId="4122425894" sldId="256"/>
@@ -272,567 +264,207 @@
           </ac:spMkLst>
         </pc:spChg>
         <pc:spChg chg="add del mod">
-          <ac:chgData name="Fatima Pillosu" userId="a6295d4dc9e22643" providerId="LiveId" clId="{81937EDE-744E-40B0-955C-4DD4FF246C01}" dt="2025-05-24T15:18:26.661" v="487" actId="478"/>
+          <ac:chgData name="Fatima Pillosu" userId="a6295d4dc9e22643" providerId="LiveId" clId="{87453732-75AC-4426-B5D3-B7C69C2D4F54}" dt="2026-01-26T21:37:55.954" v="188" actId="478"/>
           <ac:spMkLst>
             <pc:docMk/>
             <pc:sldMk cId="4122425894" sldId="256"/>
-            <ac:spMk id="22" creationId="{674AD910-1B61-47A4-951D-804727D45E23}"/>
+            <ac:spMk id="24" creationId="{6E3396C0-A78F-8E8A-1353-A1E6AFBA5E5A}"/>
           </ac:spMkLst>
         </pc:spChg>
-        <pc:spChg chg="add del mod">
-          <ac:chgData name="Fatima Pillosu" userId="a6295d4dc9e22643" providerId="LiveId" clId="{81937EDE-744E-40B0-955C-4DD4FF246C01}" dt="2025-05-24T15:18:25.644" v="486" actId="478"/>
+        <pc:spChg chg="add mod">
+          <ac:chgData name="Fatima Pillosu" userId="a6295d4dc9e22643" providerId="LiveId" clId="{87453732-75AC-4426-B5D3-B7C69C2D4F54}" dt="2026-01-26T21:40:41.567" v="260" actId="14100"/>
           <ac:spMkLst>
             <pc:docMk/>
             <pc:sldMk cId="4122425894" sldId="256"/>
-            <ac:spMk id="24" creationId="{B591B0C3-71FC-7FCC-65E4-9CCEA2F0F8BF}"/>
+            <ac:spMk id="25" creationId="{7382BBAC-0F4E-A979-DC59-08506F4D434A}"/>
           </ac:spMkLst>
         </pc:spChg>
-        <pc:spChg chg="add del mod">
-          <ac:chgData name="Fatima Pillosu" userId="a6295d4dc9e22643" providerId="LiveId" clId="{81937EDE-744E-40B0-955C-4DD4FF246C01}" dt="2025-05-24T15:18:24.474" v="485" actId="478"/>
-          <ac:spMkLst>
-            <pc:docMk/>
-            <pc:sldMk cId="4122425894" sldId="256"/>
-            <ac:spMk id="26" creationId="{4D808B60-0113-71BA-9F0F-6EBA39F94793}"/>
-          </ac:spMkLst>
-        </pc:spChg>
-        <pc:spChg chg="add del mod">
-          <ac:chgData name="Fatima Pillosu" userId="a6295d4dc9e22643" providerId="LiveId" clId="{81937EDE-744E-40B0-955C-4DD4FF246C01}" dt="2025-05-24T15:23:40.171" v="582" actId="478"/>
-          <ac:spMkLst>
-            <pc:docMk/>
-            <pc:sldMk cId="4122425894" sldId="256"/>
-            <ac:spMk id="27" creationId="{BA18CEA7-D561-E942-AF7E-36D4DC6AFA71}"/>
-          </ac:spMkLst>
-        </pc:spChg>
-        <pc:spChg chg="add del mod">
-          <ac:chgData name="Fatima Pillosu" userId="a6295d4dc9e22643" providerId="LiveId" clId="{81937EDE-744E-40B0-955C-4DD4FF246C01}" dt="2025-05-24T15:23:38.877" v="581" actId="478"/>
-          <ac:spMkLst>
-            <pc:docMk/>
-            <pc:sldMk cId="4122425894" sldId="256"/>
-            <ac:spMk id="28" creationId="{918E75C3-5CDB-195F-5DB7-B0339D61C6CB}"/>
-          </ac:spMkLst>
-        </pc:spChg>
-        <pc:spChg chg="add del mod">
-          <ac:chgData name="Fatima Pillosu" userId="a6295d4dc9e22643" providerId="LiveId" clId="{81937EDE-744E-40B0-955C-4DD4FF246C01}" dt="2025-05-24T15:23:38.877" v="581" actId="478"/>
-          <ac:spMkLst>
-            <pc:docMk/>
-            <pc:sldMk cId="4122425894" sldId="256"/>
-            <ac:spMk id="29" creationId="{9D044F31-F510-8CE2-E9AB-A12152FACE8A}"/>
-          </ac:spMkLst>
-        </pc:spChg>
-        <pc:spChg chg="add del mod">
-          <ac:chgData name="Fatima Pillosu" userId="a6295d4dc9e22643" providerId="LiveId" clId="{81937EDE-744E-40B0-955C-4DD4FF246C01}" dt="2025-05-24T15:23:38.877" v="581" actId="478"/>
-          <ac:spMkLst>
-            <pc:docMk/>
-            <pc:sldMk cId="4122425894" sldId="256"/>
-            <ac:spMk id="30" creationId="{05AD9EF9-1FC1-7DE7-781D-06B0BD25813C}"/>
-          </ac:spMkLst>
-        </pc:spChg>
-        <pc:spChg chg="add del mod">
-          <ac:chgData name="Fatima Pillosu" userId="a6295d4dc9e22643" providerId="LiveId" clId="{81937EDE-744E-40B0-955C-4DD4FF246C01}" dt="2025-05-24T15:23:38.877" v="581" actId="478"/>
-          <ac:spMkLst>
-            <pc:docMk/>
-            <pc:sldMk cId="4122425894" sldId="256"/>
-            <ac:spMk id="31" creationId="{9D837A11-1233-E8DB-5BF5-DB383B34C6D5}"/>
-          </ac:spMkLst>
-        </pc:spChg>
-        <pc:spChg chg="add del mod">
-          <ac:chgData name="Fatima Pillosu" userId="a6295d4dc9e22643" providerId="LiveId" clId="{81937EDE-744E-40B0-955C-4DD4FF246C01}" dt="2025-05-24T15:31:47.897" v="735" actId="21"/>
-          <ac:spMkLst>
-            <pc:docMk/>
-            <pc:sldMk cId="4122425894" sldId="256"/>
-            <ac:spMk id="32" creationId="{5C01AC5B-335B-B045-C3F5-C5BCCD86B285}"/>
-          </ac:spMkLst>
-        </pc:spChg>
-        <pc:spChg chg="add del mod ord">
-          <ac:chgData name="Fatima Pillosu" userId="a6295d4dc9e22643" providerId="LiveId" clId="{81937EDE-744E-40B0-955C-4DD4FF246C01}" dt="2025-05-24T15:31:47.897" v="735" actId="21"/>
-          <ac:spMkLst>
-            <pc:docMk/>
-            <pc:sldMk cId="4122425894" sldId="256"/>
-            <ac:spMk id="33" creationId="{F9D189E0-63EF-39E1-4398-BDC314615434}"/>
-          </ac:spMkLst>
-        </pc:spChg>
-        <pc:spChg chg="add del mod">
-          <ac:chgData name="Fatima Pillosu" userId="a6295d4dc9e22643" providerId="LiveId" clId="{81937EDE-744E-40B0-955C-4DD4FF246C01}" dt="2025-05-24T15:31:47.897" v="735" actId="21"/>
-          <ac:spMkLst>
-            <pc:docMk/>
-            <pc:sldMk cId="4122425894" sldId="256"/>
-            <ac:spMk id="34" creationId="{ADED3C9F-9E74-620E-822A-088067549358}"/>
-          </ac:spMkLst>
-        </pc:spChg>
-        <pc:spChg chg="add del mod">
-          <ac:chgData name="Fatima Pillosu" userId="a6295d4dc9e22643" providerId="LiveId" clId="{81937EDE-744E-40B0-955C-4DD4FF246C01}" dt="2025-05-24T15:31:47.897" v="735" actId="21"/>
-          <ac:spMkLst>
-            <pc:docMk/>
-            <pc:sldMk cId="4122425894" sldId="256"/>
-            <ac:spMk id="36" creationId="{9D3CED01-F71E-3948-1899-DB02401CEF03}"/>
-          </ac:spMkLst>
-        </pc:spChg>
-        <pc:spChg chg="add del mod">
-          <ac:chgData name="Fatima Pillosu" userId="a6295d4dc9e22643" providerId="LiveId" clId="{81937EDE-744E-40B0-955C-4DD4FF246C01}" dt="2025-05-24T15:31:47.897" v="735" actId="21"/>
-          <ac:spMkLst>
-            <pc:docMk/>
-            <pc:sldMk cId="4122425894" sldId="256"/>
-            <ac:spMk id="37" creationId="{B8EAAEBD-87D6-A874-A4EE-2D1C73B6EE68}"/>
-          </ac:spMkLst>
-        </pc:spChg>
-        <pc:spChg chg="add del mod">
-          <ac:chgData name="Fatima Pillosu" userId="a6295d4dc9e22643" providerId="LiveId" clId="{81937EDE-744E-40B0-955C-4DD4FF246C01}" dt="2025-05-24T15:31:47.897" v="735" actId="21"/>
-          <ac:spMkLst>
-            <pc:docMk/>
-            <pc:sldMk cId="4122425894" sldId="256"/>
-            <ac:spMk id="39" creationId="{E7C5F7F9-5E31-2949-29C1-87AEBD64164D}"/>
-          </ac:spMkLst>
-        </pc:spChg>
-        <pc:spChg chg="add del mod">
-          <ac:chgData name="Fatima Pillosu" userId="a6295d4dc9e22643" providerId="LiveId" clId="{81937EDE-744E-40B0-955C-4DD4FF246C01}" dt="2025-05-24T15:31:47.897" v="735" actId="21"/>
-          <ac:spMkLst>
-            <pc:docMk/>
-            <pc:sldMk cId="4122425894" sldId="256"/>
-            <ac:spMk id="40" creationId="{63F45B9D-FD4D-83DD-BA9C-15988E21AF86}"/>
-          </ac:spMkLst>
-        </pc:spChg>
-        <pc:spChg chg="add del mod">
-          <ac:chgData name="Fatima Pillosu" userId="a6295d4dc9e22643" providerId="LiveId" clId="{81937EDE-744E-40B0-955C-4DD4FF246C01}" dt="2025-05-24T15:31:47.897" v="735" actId="21"/>
-          <ac:spMkLst>
-            <pc:docMk/>
-            <pc:sldMk cId="4122425894" sldId="256"/>
-            <ac:spMk id="42" creationId="{A5D46F59-364E-74DF-A603-1E1C966252EB}"/>
-          </ac:spMkLst>
-        </pc:spChg>
-        <pc:spChg chg="add del mod">
-          <ac:chgData name="Fatima Pillosu" userId="a6295d4dc9e22643" providerId="LiveId" clId="{81937EDE-744E-40B0-955C-4DD4FF246C01}" dt="2025-05-24T15:31:47.897" v="735" actId="21"/>
-          <ac:spMkLst>
-            <pc:docMk/>
-            <pc:sldMk cId="4122425894" sldId="256"/>
-            <ac:spMk id="43" creationId="{6F2479BC-B6C5-6870-44DB-2EC1787ED6C2}"/>
-          </ac:spMkLst>
-        </pc:spChg>
-        <pc:spChg chg="add del mod">
-          <ac:chgData name="Fatima Pillosu" userId="a6295d4dc9e22643" providerId="LiveId" clId="{81937EDE-744E-40B0-955C-4DD4FF246C01}" dt="2025-05-24T15:31:47.897" v="735" actId="21"/>
-          <ac:spMkLst>
-            <pc:docMk/>
-            <pc:sldMk cId="4122425894" sldId="256"/>
-            <ac:spMk id="45" creationId="{4F77D09B-7342-3D1A-41F4-C8A9CACBFECF}"/>
-          </ac:spMkLst>
-        </pc:spChg>
-        <pc:spChg chg="add del mod">
-          <ac:chgData name="Fatima Pillosu" userId="a6295d4dc9e22643" providerId="LiveId" clId="{81937EDE-744E-40B0-955C-4DD4FF246C01}" dt="2025-05-24T15:31:47.897" v="735" actId="21"/>
-          <ac:spMkLst>
-            <pc:docMk/>
-            <pc:sldMk cId="4122425894" sldId="256"/>
-            <ac:spMk id="46" creationId="{731F2D9F-A790-887B-DA17-310F988188AD}"/>
-          </ac:spMkLst>
-        </pc:spChg>
-        <pc:spChg chg="add del mod">
-          <ac:chgData name="Fatima Pillosu" userId="a6295d4dc9e22643" providerId="LiveId" clId="{81937EDE-744E-40B0-955C-4DD4FF246C01}" dt="2025-05-24T15:31:47.897" v="735" actId="21"/>
-          <ac:spMkLst>
-            <pc:docMk/>
-            <pc:sldMk cId="4122425894" sldId="256"/>
-            <ac:spMk id="48" creationId="{2D2D17C8-CD3D-E22F-EBA5-2BC01EC4F1B8}"/>
-          </ac:spMkLst>
-        </pc:spChg>
-        <pc:spChg chg="add del mod">
-          <ac:chgData name="Fatima Pillosu" userId="a6295d4dc9e22643" providerId="LiveId" clId="{81937EDE-744E-40B0-955C-4DD4FF246C01}" dt="2025-05-24T15:31:47.897" v="735" actId="21"/>
-          <ac:spMkLst>
-            <pc:docMk/>
-            <pc:sldMk cId="4122425894" sldId="256"/>
-            <ac:spMk id="49" creationId="{C128B50E-D96D-2132-A672-13E1B744C2FB}"/>
-          </ac:spMkLst>
-        </pc:spChg>
-        <pc:spChg chg="add del mod">
-          <ac:chgData name="Fatima Pillosu" userId="a6295d4dc9e22643" providerId="LiveId" clId="{81937EDE-744E-40B0-955C-4DD4FF246C01}" dt="2025-05-24T15:31:47.897" v="735" actId="21"/>
-          <ac:spMkLst>
-            <pc:docMk/>
-            <pc:sldMk cId="4122425894" sldId="256"/>
-            <ac:spMk id="50" creationId="{3BD3CE7A-AEE9-D963-4344-84BC8740B771}"/>
-          </ac:spMkLst>
-        </pc:spChg>
-        <pc:spChg chg="add del">
-          <ac:chgData name="Fatima Pillosu" userId="a6295d4dc9e22643" providerId="LiveId" clId="{81937EDE-744E-40B0-955C-4DD4FF246C01}" dt="2025-05-24T15:31:44.995" v="734" actId="478"/>
-          <ac:spMkLst>
-            <pc:docMk/>
-            <pc:sldMk cId="4122425894" sldId="256"/>
-            <ac:spMk id="51" creationId="{57D0938D-FB59-DBF6-9C8A-EE20B7DE6DCF}"/>
-          </ac:spMkLst>
-        </pc:spChg>
-        <pc:spChg chg="add mod">
-          <ac:chgData name="Fatima Pillosu" userId="a6295d4dc9e22643" providerId="LiveId" clId="{81937EDE-744E-40B0-955C-4DD4FF246C01}" dt="2025-05-24T15:31:58.647" v="738" actId="1035"/>
+        <pc:spChg chg="mod">
+          <ac:chgData name="Fatima Pillosu" userId="a6295d4dc9e22643" providerId="LiveId" clId="{87453732-75AC-4426-B5D3-B7C69C2D4F54}" dt="2026-01-26T21:38:13.504" v="202" actId="1035"/>
           <ac:spMkLst>
             <pc:docMk/>
             <pc:sldMk cId="4122425894" sldId="256"/>
             <ac:spMk id="52" creationId="{F9D189E0-63EF-39E1-4398-BDC314615434}"/>
           </ac:spMkLst>
         </pc:spChg>
-        <pc:spChg chg="add mod">
-          <ac:chgData name="Fatima Pillosu" userId="a6295d4dc9e22643" providerId="LiveId" clId="{81937EDE-744E-40B0-955C-4DD4FF246C01}" dt="2025-05-24T16:31:25.617" v="1189" actId="20577"/>
+        <pc:spChg chg="mod">
+          <ac:chgData name="Fatima Pillosu" userId="a6295d4dc9e22643" providerId="LiveId" clId="{87453732-75AC-4426-B5D3-B7C69C2D4F54}" dt="2026-01-26T21:38:05.195" v="189" actId="255"/>
           <ac:spMkLst>
             <pc:docMk/>
             <pc:sldMk cId="4122425894" sldId="256"/>
             <ac:spMk id="55" creationId="{0A22D3D2-33E3-536C-ED6E-DA2D0B55AFCA}"/>
           </ac:spMkLst>
         </pc:spChg>
-        <pc:spChg chg="add mod">
-          <ac:chgData name="Fatima Pillosu" userId="a6295d4dc9e22643" providerId="LiveId" clId="{81937EDE-744E-40B0-955C-4DD4FF246C01}" dt="2025-05-24T15:31:58.647" v="738" actId="1035"/>
+        <pc:spChg chg="mod">
+          <ac:chgData name="Fatima Pillosu" userId="a6295d4dc9e22643" providerId="LiveId" clId="{87453732-75AC-4426-B5D3-B7C69C2D4F54}" dt="2026-01-26T21:38:13.504" v="202" actId="1035"/>
           <ac:spMkLst>
             <pc:docMk/>
             <pc:sldMk cId="4122425894" sldId="256"/>
             <ac:spMk id="57" creationId="{5C01AC5B-335B-B045-C3F5-C5BCCD86B285}"/>
           </ac:spMkLst>
         </pc:spChg>
-        <pc:spChg chg="add mod">
-          <ac:chgData name="Fatima Pillosu" userId="a6295d4dc9e22643" providerId="LiveId" clId="{81937EDE-744E-40B0-955C-4DD4FF246C01}" dt="2025-05-24T15:31:58.647" v="738" actId="1035"/>
+        <pc:spChg chg="mod">
+          <ac:chgData name="Fatima Pillosu" userId="a6295d4dc9e22643" providerId="LiveId" clId="{87453732-75AC-4426-B5D3-B7C69C2D4F54}" dt="2026-01-26T21:38:49.320" v="232" actId="1035"/>
           <ac:spMkLst>
             <pc:docMk/>
             <pc:sldMk cId="4122425894" sldId="256"/>
             <ac:spMk id="58" creationId="{ADED3C9F-9E74-620E-822A-088067549358}"/>
           </ac:spMkLst>
         </pc:spChg>
-        <pc:spChg chg="add mod">
-          <ac:chgData name="Fatima Pillosu" userId="a6295d4dc9e22643" providerId="LiveId" clId="{81937EDE-744E-40B0-955C-4DD4FF246C01}" dt="2025-05-24T15:31:58.647" v="738" actId="1035"/>
+        <pc:spChg chg="mod">
+          <ac:chgData name="Fatima Pillosu" userId="a6295d4dc9e22643" providerId="LiveId" clId="{87453732-75AC-4426-B5D3-B7C69C2D4F54}" dt="2026-01-26T21:38:49.320" v="232" actId="1035"/>
           <ac:spMkLst>
             <pc:docMk/>
             <pc:sldMk cId="4122425894" sldId="256"/>
             <ac:spMk id="60" creationId="{9D3CED01-F71E-3948-1899-DB02401CEF03}"/>
           </ac:spMkLst>
         </pc:spChg>
-        <pc:spChg chg="add mod">
-          <ac:chgData name="Fatima Pillosu" userId="a6295d4dc9e22643" providerId="LiveId" clId="{81937EDE-744E-40B0-955C-4DD4FF246C01}" dt="2025-05-24T15:31:58.647" v="738" actId="1035"/>
+        <pc:spChg chg="mod">
+          <ac:chgData name="Fatima Pillosu" userId="a6295d4dc9e22643" providerId="LiveId" clId="{87453732-75AC-4426-B5D3-B7C69C2D4F54}" dt="2026-01-26T21:38:55.887" v="237" actId="1035"/>
           <ac:spMkLst>
             <pc:docMk/>
             <pc:sldMk cId="4122425894" sldId="256"/>
             <ac:spMk id="61" creationId="{B8EAAEBD-87D6-A874-A4EE-2D1C73B6EE68}"/>
           </ac:spMkLst>
         </pc:spChg>
-        <pc:spChg chg="add mod">
-          <ac:chgData name="Fatima Pillosu" userId="a6295d4dc9e22643" providerId="LiveId" clId="{81937EDE-744E-40B0-955C-4DD4FF246C01}" dt="2025-05-24T15:31:58.647" v="738" actId="1035"/>
+        <pc:spChg chg="mod">
+          <ac:chgData name="Fatima Pillosu" userId="a6295d4dc9e22643" providerId="LiveId" clId="{87453732-75AC-4426-B5D3-B7C69C2D4F54}" dt="2026-01-26T21:38:55.887" v="237" actId="1035"/>
           <ac:spMkLst>
             <pc:docMk/>
             <pc:sldMk cId="4122425894" sldId="256"/>
             <ac:spMk id="63" creationId="{E7C5F7F9-5E31-2949-29C1-87AEBD64164D}"/>
           </ac:spMkLst>
         </pc:spChg>
-        <pc:spChg chg="add mod">
-          <ac:chgData name="Fatima Pillosu" userId="a6295d4dc9e22643" providerId="LiveId" clId="{81937EDE-744E-40B0-955C-4DD4FF246C01}" dt="2025-05-24T15:31:58.647" v="738" actId="1035"/>
+        <pc:spChg chg="mod">
+          <ac:chgData name="Fatima Pillosu" userId="a6295d4dc9e22643" providerId="LiveId" clId="{87453732-75AC-4426-B5D3-B7C69C2D4F54}" dt="2026-01-26T21:38:13.504" v="202" actId="1035"/>
           <ac:spMkLst>
             <pc:docMk/>
             <pc:sldMk cId="4122425894" sldId="256"/>
             <ac:spMk id="64" creationId="{63F45B9D-FD4D-83DD-BA9C-15988E21AF86}"/>
           </ac:spMkLst>
         </pc:spChg>
-        <pc:spChg chg="add mod">
-          <ac:chgData name="Fatima Pillosu" userId="a6295d4dc9e22643" providerId="LiveId" clId="{81937EDE-744E-40B0-955C-4DD4FF246C01}" dt="2025-05-24T15:31:58.647" v="738" actId="1035"/>
+        <pc:spChg chg="mod">
+          <ac:chgData name="Fatima Pillosu" userId="a6295d4dc9e22643" providerId="LiveId" clId="{87453732-75AC-4426-B5D3-B7C69C2D4F54}" dt="2026-01-26T21:38:13.504" v="202" actId="1035"/>
           <ac:spMkLst>
             <pc:docMk/>
             <pc:sldMk cId="4122425894" sldId="256"/>
             <ac:spMk id="66" creationId="{A5D46F59-364E-74DF-A603-1E1C966252EB}"/>
           </ac:spMkLst>
         </pc:spChg>
-        <pc:spChg chg="add mod">
-          <ac:chgData name="Fatima Pillosu" userId="a6295d4dc9e22643" providerId="LiveId" clId="{81937EDE-744E-40B0-955C-4DD4FF246C01}" dt="2025-05-24T15:31:58.647" v="738" actId="1035"/>
+        <pc:spChg chg="mod">
+          <ac:chgData name="Fatima Pillosu" userId="a6295d4dc9e22643" providerId="LiveId" clId="{87453732-75AC-4426-B5D3-B7C69C2D4F54}" dt="2026-01-26T21:38:49.320" v="232" actId="1035"/>
           <ac:spMkLst>
             <pc:docMk/>
             <pc:sldMk cId="4122425894" sldId="256"/>
             <ac:spMk id="67" creationId="{6F2479BC-B6C5-6870-44DB-2EC1787ED6C2}"/>
           </ac:spMkLst>
         </pc:spChg>
-        <pc:spChg chg="add mod">
-          <ac:chgData name="Fatima Pillosu" userId="a6295d4dc9e22643" providerId="LiveId" clId="{81937EDE-744E-40B0-955C-4DD4FF246C01}" dt="2025-05-24T15:31:58.647" v="738" actId="1035"/>
+        <pc:spChg chg="mod">
+          <ac:chgData name="Fatima Pillosu" userId="a6295d4dc9e22643" providerId="LiveId" clId="{87453732-75AC-4426-B5D3-B7C69C2D4F54}" dt="2026-01-26T21:38:49.320" v="232" actId="1035"/>
           <ac:spMkLst>
             <pc:docMk/>
             <pc:sldMk cId="4122425894" sldId="256"/>
             <ac:spMk id="69" creationId="{4F77D09B-7342-3D1A-41F4-C8A9CACBFECF}"/>
           </ac:spMkLst>
         </pc:spChg>
-        <pc:spChg chg="add mod">
-          <ac:chgData name="Fatima Pillosu" userId="a6295d4dc9e22643" providerId="LiveId" clId="{81937EDE-744E-40B0-955C-4DD4FF246C01}" dt="2025-05-24T15:31:58.647" v="738" actId="1035"/>
+        <pc:spChg chg="mod">
+          <ac:chgData name="Fatima Pillosu" userId="a6295d4dc9e22643" providerId="LiveId" clId="{87453732-75AC-4426-B5D3-B7C69C2D4F54}" dt="2026-01-26T21:38:55.887" v="237" actId="1035"/>
           <ac:spMkLst>
             <pc:docMk/>
             <pc:sldMk cId="4122425894" sldId="256"/>
             <ac:spMk id="70" creationId="{731F2D9F-A790-887B-DA17-310F988188AD}"/>
           </ac:spMkLst>
         </pc:spChg>
-        <pc:spChg chg="add mod">
-          <ac:chgData name="Fatima Pillosu" userId="a6295d4dc9e22643" providerId="LiveId" clId="{81937EDE-744E-40B0-955C-4DD4FF246C01}" dt="2025-05-24T15:31:58.647" v="738" actId="1035"/>
+        <pc:spChg chg="mod">
+          <ac:chgData name="Fatima Pillosu" userId="a6295d4dc9e22643" providerId="LiveId" clId="{87453732-75AC-4426-B5D3-B7C69C2D4F54}" dt="2026-01-26T21:38:55.887" v="237" actId="1035"/>
           <ac:spMkLst>
             <pc:docMk/>
             <pc:sldMk cId="4122425894" sldId="256"/>
             <ac:spMk id="72" creationId="{2D2D17C8-CD3D-E22F-EBA5-2BC01EC4F1B8}"/>
           </ac:spMkLst>
         </pc:spChg>
-        <pc:spChg chg="add mod">
-          <ac:chgData name="Fatima Pillosu" userId="a6295d4dc9e22643" providerId="LiveId" clId="{81937EDE-744E-40B0-955C-4DD4FF246C01}" dt="2025-05-24T16:22:15.304" v="1111" actId="1037"/>
+        <pc:spChg chg="del">
+          <ac:chgData name="Fatima Pillosu" userId="a6295d4dc9e22643" providerId="LiveId" clId="{87453732-75AC-4426-B5D3-B7C69C2D4F54}" dt="2026-01-26T21:33:23.054" v="27" actId="478"/>
           <ac:spMkLst>
             <pc:docMk/>
             <pc:sldMk cId="4122425894" sldId="256"/>
             <ac:spMk id="73" creationId="{C128B50E-D96D-2132-A672-13E1B744C2FB}"/>
           </ac:spMkLst>
         </pc:spChg>
-        <pc:spChg chg="add mod">
-          <ac:chgData name="Fatima Pillosu" userId="a6295d4dc9e22643" providerId="LiveId" clId="{81937EDE-744E-40B0-955C-4DD4FF246C01}" dt="2025-05-24T16:21:25.998" v="1076" actId="1038"/>
+        <pc:spChg chg="del">
+          <ac:chgData name="Fatima Pillosu" userId="a6295d4dc9e22643" providerId="LiveId" clId="{87453732-75AC-4426-B5D3-B7C69C2D4F54}" dt="2026-01-26T21:33:24.633" v="28" actId="478"/>
           <ac:spMkLst>
             <pc:docMk/>
             <pc:sldMk cId="4122425894" sldId="256"/>
             <ac:spMk id="74" creationId="{3BD3CE7A-AEE9-D963-4344-84BC8740B771}"/>
           </ac:spMkLst>
         </pc:spChg>
-        <pc:picChg chg="add mod modCrop">
-          <ac:chgData name="Fatima Pillosu" userId="a6295d4dc9e22643" providerId="LiveId" clId="{81937EDE-744E-40B0-955C-4DD4FF246C01}" dt="2025-05-24T16:22:15.304" v="1111" actId="1037"/>
-          <ac:picMkLst>
+        <pc:grpChg chg="add mod ord">
+          <ac:chgData name="Fatima Pillosu" userId="a6295d4dc9e22643" providerId="LiveId" clId="{87453732-75AC-4426-B5D3-B7C69C2D4F54}" dt="2026-01-26T21:42:02.411" v="302" actId="166"/>
+          <ac:grpSpMkLst>
             <pc:docMk/>
             <pc:sldMk cId="4122425894" sldId="256"/>
-            <ac:picMk id="3" creationId="{2AC779A3-2F78-CEFF-DADF-B1AF64D891E9}"/>
-          </ac:picMkLst>
-        </pc:picChg>
-        <pc:picChg chg="add del mod modCrop">
-          <ac:chgData name="Fatima Pillosu" userId="a6295d4dc9e22643" providerId="LiveId" clId="{81937EDE-744E-40B0-955C-4DD4FF246C01}" dt="2025-05-24T15:31:47.897" v="735" actId="21"/>
-          <ac:picMkLst>
-            <pc:docMk/>
-            <pc:sldMk cId="4122425894" sldId="256"/>
-            <ac:picMk id="5" creationId="{F7615811-68D1-CD2F-E5CC-DBD3BB7955D0}"/>
-          </ac:picMkLst>
-        </pc:picChg>
-        <pc:picChg chg="add del mod modCrop">
-          <ac:chgData name="Fatima Pillosu" userId="a6295d4dc9e22643" providerId="LiveId" clId="{81937EDE-744E-40B0-955C-4DD4FF246C01}" dt="2025-05-24T15:31:47.897" v="735" actId="21"/>
-          <ac:picMkLst>
-            <pc:docMk/>
-            <pc:sldMk cId="4122425894" sldId="256"/>
-            <ac:picMk id="7" creationId="{54CBA38D-727F-0A78-5908-70994BD3CBC0}"/>
-          </ac:picMkLst>
-        </pc:picChg>
-        <pc:picChg chg="add mod">
-          <ac:chgData name="Fatima Pillosu" userId="a6295d4dc9e22643" providerId="LiveId" clId="{81937EDE-744E-40B0-955C-4DD4FF246C01}" dt="2025-05-24T16:22:15.304" v="1111" actId="1037"/>
+            <ac:grpSpMk id="22" creationId="{9B681E22-1678-D007-CB99-5A08F5ACD595}"/>
+          </ac:grpSpMkLst>
+        </pc:grpChg>
+        <pc:picChg chg="mod">
+          <ac:chgData name="Fatima Pillosu" userId="a6295d4dc9e22643" providerId="LiveId" clId="{87453732-75AC-4426-B5D3-B7C69C2D4F54}" dt="2026-01-26T21:35:47.447" v="84" actId="14100"/>
           <ac:picMkLst>
             <pc:docMk/>
             <pc:sldMk cId="4122425894" sldId="256"/>
             <ac:picMk id="53" creationId="{F7615811-68D1-CD2F-E5CC-DBD3BB7955D0}"/>
           </ac:picMkLst>
         </pc:picChg>
-        <pc:picChg chg="add mod">
-          <ac:chgData name="Fatima Pillosu" userId="a6295d4dc9e22643" providerId="LiveId" clId="{81937EDE-744E-40B0-955C-4DD4FF246C01}" dt="2025-05-24T16:21:25.998" v="1076" actId="1038"/>
+        <pc:picChg chg="mod ord modCrop">
+          <ac:chgData name="Fatima Pillosu" userId="a6295d4dc9e22643" providerId="LiveId" clId="{87453732-75AC-4426-B5D3-B7C69C2D4F54}" dt="2026-01-26T21:41:29.069" v="263" actId="732"/>
           <ac:picMkLst>
             <pc:docMk/>
             <pc:sldMk cId="4122425894" sldId="256"/>
             <ac:picMk id="54" creationId="{54CBA38D-727F-0A78-5908-70994BD3CBC0}"/>
           </ac:picMkLst>
         </pc:picChg>
-        <pc:cxnChg chg="add mod">
-          <ac:chgData name="Fatima Pillosu" userId="a6295d4dc9e22643" providerId="LiveId" clId="{81937EDE-744E-40B0-955C-4DD4FF246C01}" dt="2025-05-24T16:22:54.096" v="1136" actId="1036"/>
+        <pc:cxnChg chg="mod">
+          <ac:chgData name="Fatima Pillosu" userId="a6295d4dc9e22643" providerId="LiveId" clId="{87453732-75AC-4426-B5D3-B7C69C2D4F54}" dt="2026-01-26T21:41:45.762" v="270" actId="1036"/>
           <ac:cxnSpMkLst>
             <pc:docMk/>
             <pc:sldMk cId="4122425894" sldId="256"/>
             <ac:cxnSpMk id="2" creationId="{1C3B6113-7DA5-DE91-03B2-E179F9027895}"/>
           </ac:cxnSpMkLst>
         </pc:cxnChg>
-        <pc:cxnChg chg="add del mod">
-          <ac:chgData name="Fatima Pillosu" userId="a6295d4dc9e22643" providerId="LiveId" clId="{81937EDE-744E-40B0-955C-4DD4FF246C01}" dt="2025-05-24T15:31:47.897" v="735" actId="21"/>
-          <ac:cxnSpMkLst>
-            <pc:docMk/>
-            <pc:sldMk cId="4122425894" sldId="256"/>
-            <ac:cxnSpMk id="10" creationId="{A3B5DB50-5E90-2119-CFA0-EBA1E90C5F8E}"/>
-          </ac:cxnSpMkLst>
-        </pc:cxnChg>
-        <pc:cxnChg chg="add del mod">
-          <ac:chgData name="Fatima Pillosu" userId="a6295d4dc9e22643" providerId="LiveId" clId="{81937EDE-744E-40B0-955C-4DD4FF246C01}" dt="2025-05-24T15:23:23.221" v="579" actId="478"/>
-          <ac:cxnSpMkLst>
-            <pc:docMk/>
-            <pc:sldMk cId="4122425894" sldId="256"/>
-            <ac:cxnSpMk id="11" creationId="{8A94EDE8-FBF4-F717-F75D-F710CFC64AE6}"/>
-          </ac:cxnSpMkLst>
-        </pc:cxnChg>
-        <pc:cxnChg chg="add del mod">
-          <ac:chgData name="Fatima Pillosu" userId="a6295d4dc9e22643" providerId="LiveId" clId="{81937EDE-744E-40B0-955C-4DD4FF246C01}" dt="2025-05-24T15:23:23.221" v="579" actId="478"/>
-          <ac:cxnSpMkLst>
-            <pc:docMk/>
-            <pc:sldMk cId="4122425894" sldId="256"/>
-            <ac:cxnSpMk id="12" creationId="{0B3A5813-C1DC-E49C-BFA6-7F5848D3DC27}"/>
-          </ac:cxnSpMkLst>
-        </pc:cxnChg>
-        <pc:cxnChg chg="add del mod">
-          <ac:chgData name="Fatima Pillosu" userId="a6295d4dc9e22643" providerId="LiveId" clId="{81937EDE-744E-40B0-955C-4DD4FF246C01}" dt="2025-05-24T15:12:30.959" v="368" actId="478"/>
-          <ac:cxnSpMkLst>
-            <pc:docMk/>
-            <pc:sldMk cId="4122425894" sldId="256"/>
-            <ac:cxnSpMk id="13" creationId="{7F20C4B4-8D94-56CF-5E2B-B68EA9993129}"/>
-          </ac:cxnSpMkLst>
-        </pc:cxnChg>
-        <pc:cxnChg chg="add del mod">
-          <ac:chgData name="Fatima Pillosu" userId="a6295d4dc9e22643" providerId="LiveId" clId="{81937EDE-744E-40B0-955C-4DD4FF246C01}" dt="2025-05-24T15:12:26.459" v="365" actId="478"/>
-          <ac:cxnSpMkLst>
-            <pc:docMk/>
-            <pc:sldMk cId="4122425894" sldId="256"/>
-            <ac:cxnSpMk id="14" creationId="{DFFB09DB-1475-208D-5ADA-54391E49165E}"/>
-          </ac:cxnSpMkLst>
-        </pc:cxnChg>
-        <pc:cxnChg chg="add del mod">
-          <ac:chgData name="Fatima Pillosu" userId="a6295d4dc9e22643" providerId="LiveId" clId="{81937EDE-744E-40B0-955C-4DD4FF246C01}" dt="2025-05-24T15:12:23.378" v="362" actId="478"/>
-          <ac:cxnSpMkLst>
-            <pc:docMk/>
-            <pc:sldMk cId="4122425894" sldId="256"/>
-            <ac:cxnSpMk id="15" creationId="{CBFFF09C-4B10-98CE-CC8A-205A6BA9A7B2}"/>
-          </ac:cxnSpMkLst>
-        </pc:cxnChg>
-        <pc:cxnChg chg="add del mod">
-          <ac:chgData name="Fatima Pillosu" userId="a6295d4dc9e22643" providerId="LiveId" clId="{81937EDE-744E-40B0-955C-4DD4FF246C01}" dt="2025-05-24T15:12:25.358" v="364" actId="478"/>
-          <ac:cxnSpMkLst>
-            <pc:docMk/>
-            <pc:sldMk cId="4122425894" sldId="256"/>
-            <ac:cxnSpMk id="16" creationId="{AF0C996B-E6C4-52F8-577D-A6D2AA8BCD57}"/>
-          </ac:cxnSpMkLst>
-        </pc:cxnChg>
-        <pc:cxnChg chg="add del mod">
-          <ac:chgData name="Fatima Pillosu" userId="a6295d4dc9e22643" providerId="LiveId" clId="{81937EDE-744E-40B0-955C-4DD4FF246C01}" dt="2025-05-24T15:12:22.614" v="361" actId="478"/>
-          <ac:cxnSpMkLst>
-            <pc:docMk/>
-            <pc:sldMk cId="4122425894" sldId="256"/>
-            <ac:cxnSpMk id="17" creationId="{A142B353-86A8-4CEA-793C-9443E919E4F3}"/>
-          </ac:cxnSpMkLst>
-        </pc:cxnChg>
-        <pc:cxnChg chg="add mod">
-          <ac:chgData name="Fatima Pillosu" userId="a6295d4dc9e22643" providerId="LiveId" clId="{81937EDE-744E-40B0-955C-4DD4FF246C01}" dt="2025-05-24T16:22:15.304" v="1111" actId="1037"/>
+        <pc:cxnChg chg="mod">
+          <ac:chgData name="Fatima Pillosu" userId="a6295d4dc9e22643" providerId="LiveId" clId="{87453732-75AC-4426-B5D3-B7C69C2D4F54}" dt="2026-01-26T21:36:28.075" v="118" actId="14100"/>
           <ac:cxnSpMkLst>
             <pc:docMk/>
             <pc:sldMk cId="4122425894" sldId="256"/>
             <ac:cxnSpMk id="18" creationId="{4036828A-A657-178B-A1F5-BE26E3B05901}"/>
           </ac:cxnSpMkLst>
         </pc:cxnChg>
-        <pc:cxnChg chg="add del mod">
-          <ac:chgData name="Fatima Pillosu" userId="a6295d4dc9e22643" providerId="LiveId" clId="{81937EDE-744E-40B0-955C-4DD4FF246C01}" dt="2025-05-24T15:12:24.271" v="363" actId="478"/>
-          <ac:cxnSpMkLst>
-            <pc:docMk/>
-            <pc:sldMk cId="4122425894" sldId="256"/>
-            <ac:cxnSpMk id="18" creationId="{52D34F10-070C-9482-8519-8532BDDC71FD}"/>
-          </ac:cxnSpMkLst>
-        </pc:cxnChg>
-        <pc:cxnChg chg="add del mod">
-          <ac:chgData name="Fatima Pillosu" userId="a6295d4dc9e22643" providerId="LiveId" clId="{81937EDE-744E-40B0-955C-4DD4FF246C01}" dt="2025-05-24T15:23:23.221" v="579" actId="478"/>
-          <ac:cxnSpMkLst>
-            <pc:docMk/>
-            <pc:sldMk cId="4122425894" sldId="256"/>
-            <ac:cxnSpMk id="19" creationId="{30A0FB00-9763-DBFA-458B-D9AD8FC27D2C}"/>
-          </ac:cxnSpMkLst>
-        </pc:cxnChg>
-        <pc:cxnChg chg="add mod">
-          <ac:chgData name="Fatima Pillosu" userId="a6295d4dc9e22643" providerId="LiveId" clId="{81937EDE-744E-40B0-955C-4DD4FF246C01}" dt="2025-05-24T16:22:23.321" v="1117" actId="1037"/>
+        <pc:cxnChg chg="mod">
+          <ac:chgData name="Fatima Pillosu" userId="a6295d4dc9e22643" providerId="LiveId" clId="{87453732-75AC-4426-B5D3-B7C69C2D4F54}" dt="2026-01-26T21:36:00.418" v="103" actId="164"/>
           <ac:cxnSpMkLst>
             <pc:docMk/>
             <pc:sldMk cId="4122425894" sldId="256"/>
             <ac:cxnSpMk id="19" creationId="{340882ED-88AE-1428-CC8B-4153E0855D86}"/>
           </ac:cxnSpMkLst>
         </pc:cxnChg>
-        <pc:cxnChg chg="add del mod">
-          <ac:chgData name="Fatima Pillosu" userId="a6295d4dc9e22643" providerId="LiveId" clId="{81937EDE-744E-40B0-955C-4DD4FF246C01}" dt="2025-05-24T15:23:23.221" v="579" actId="478"/>
-          <ac:cxnSpMkLst>
-            <pc:docMk/>
-            <pc:sldMk cId="4122425894" sldId="256"/>
-            <ac:cxnSpMk id="20" creationId="{E2958E59-4860-4F44-B198-EFBCE7F7171E}"/>
-          </ac:cxnSpMkLst>
-        </pc:cxnChg>
-        <pc:cxnChg chg="add del mod">
-          <ac:chgData name="Fatima Pillosu" userId="a6295d4dc9e22643" providerId="LiveId" clId="{81937EDE-744E-40B0-955C-4DD4FF246C01}" dt="2025-05-24T15:23:23.221" v="579" actId="478"/>
-          <ac:cxnSpMkLst>
-            <pc:docMk/>
-            <pc:sldMk cId="4122425894" sldId="256"/>
-            <ac:cxnSpMk id="21" creationId="{6C5219FA-B4C6-2AF0-14E1-9CD9240FF32B}"/>
-          </ac:cxnSpMkLst>
-        </pc:cxnChg>
-        <pc:cxnChg chg="add del mod">
-          <ac:chgData name="Fatima Pillosu" userId="a6295d4dc9e22643" providerId="LiveId" clId="{81937EDE-744E-40B0-955C-4DD4FF246C01}" dt="2025-05-24T15:15:14.763" v="443" actId="478"/>
-          <ac:cxnSpMkLst>
-            <pc:docMk/>
-            <pc:sldMk cId="4122425894" sldId="256"/>
-            <ac:cxnSpMk id="23" creationId="{02897783-6E1E-B663-0EDA-61241E9A2B8A}"/>
-          </ac:cxnSpMkLst>
-        </pc:cxnChg>
-        <pc:cxnChg chg="add del mod">
-          <ac:chgData name="Fatima Pillosu" userId="a6295d4dc9e22643" providerId="LiveId" clId="{81937EDE-744E-40B0-955C-4DD4FF246C01}" dt="2025-05-24T15:15:25.391" v="445" actId="478"/>
-          <ac:cxnSpMkLst>
-            <pc:docMk/>
-            <pc:sldMk cId="4122425894" sldId="256"/>
-            <ac:cxnSpMk id="25" creationId="{BA0D5841-451D-BAD9-50E1-AD6D5E9107DE}"/>
-          </ac:cxnSpMkLst>
-        </pc:cxnChg>
-        <pc:cxnChg chg="add del mod">
-          <ac:chgData name="Fatima Pillosu" userId="a6295d4dc9e22643" providerId="LiveId" clId="{81937EDE-744E-40B0-955C-4DD4FF246C01}" dt="2025-05-24T15:31:47.897" v="735" actId="21"/>
-          <ac:cxnSpMkLst>
-            <pc:docMk/>
-            <pc:sldMk cId="4122425894" sldId="256"/>
-            <ac:cxnSpMk id="35" creationId="{AD6740C4-8017-5FFD-0606-09F8D1F34D0B}"/>
-          </ac:cxnSpMkLst>
-        </pc:cxnChg>
-        <pc:cxnChg chg="add del mod">
-          <ac:chgData name="Fatima Pillosu" userId="a6295d4dc9e22643" providerId="LiveId" clId="{81937EDE-744E-40B0-955C-4DD4FF246C01}" dt="2025-05-24T15:31:47.897" v="735" actId="21"/>
-          <ac:cxnSpMkLst>
-            <pc:docMk/>
-            <pc:sldMk cId="4122425894" sldId="256"/>
-            <ac:cxnSpMk id="38" creationId="{F5E507EC-962B-1DDE-4A65-9A73030AEBD2}"/>
-          </ac:cxnSpMkLst>
-        </pc:cxnChg>
-        <pc:cxnChg chg="add del mod">
-          <ac:chgData name="Fatima Pillosu" userId="a6295d4dc9e22643" providerId="LiveId" clId="{81937EDE-744E-40B0-955C-4DD4FF246C01}" dt="2025-05-24T15:31:47.897" v="735" actId="21"/>
-          <ac:cxnSpMkLst>
-            <pc:docMk/>
-            <pc:sldMk cId="4122425894" sldId="256"/>
-            <ac:cxnSpMk id="41" creationId="{BA97DBDE-68A6-45C7-9371-3403BDA130BE}"/>
-          </ac:cxnSpMkLst>
-        </pc:cxnChg>
-        <pc:cxnChg chg="add del mod">
-          <ac:chgData name="Fatima Pillosu" userId="a6295d4dc9e22643" providerId="LiveId" clId="{81937EDE-744E-40B0-955C-4DD4FF246C01}" dt="2025-05-24T15:31:47.897" v="735" actId="21"/>
-          <ac:cxnSpMkLst>
-            <pc:docMk/>
-            <pc:sldMk cId="4122425894" sldId="256"/>
-            <ac:cxnSpMk id="44" creationId="{FAFB569D-EC0A-7B26-3CCE-FE69C05ED435}"/>
-          </ac:cxnSpMkLst>
-        </pc:cxnChg>
-        <pc:cxnChg chg="add del mod">
-          <ac:chgData name="Fatima Pillosu" userId="a6295d4dc9e22643" providerId="LiveId" clId="{81937EDE-744E-40B0-955C-4DD4FF246C01}" dt="2025-05-24T15:31:47.897" v="735" actId="21"/>
-          <ac:cxnSpMkLst>
-            <pc:docMk/>
-            <pc:sldMk cId="4122425894" sldId="256"/>
-            <ac:cxnSpMk id="47" creationId="{A38D8DD8-0A86-C096-F585-EDA547A8F43E}"/>
-          </ac:cxnSpMkLst>
-        </pc:cxnChg>
-        <pc:cxnChg chg="add mod">
-          <ac:chgData name="Fatima Pillosu" userId="a6295d4dc9e22643" providerId="LiveId" clId="{81937EDE-744E-40B0-955C-4DD4FF246C01}" dt="2025-05-24T15:31:58.647" v="738" actId="1035"/>
-          <ac:cxnSpMkLst>
-            <pc:docMk/>
-            <pc:sldMk cId="4122425894" sldId="256"/>
-            <ac:cxnSpMk id="56" creationId="{A3B5DB50-5E90-2119-CFA0-EBA1E90C5F8E}"/>
-          </ac:cxnSpMkLst>
-        </pc:cxnChg>
-        <pc:cxnChg chg="add mod">
-          <ac:chgData name="Fatima Pillosu" userId="a6295d4dc9e22643" providerId="LiveId" clId="{81937EDE-744E-40B0-955C-4DD4FF246C01}" dt="2025-05-25T07:18:02.409" v="1191" actId="208"/>
+        <pc:cxnChg chg="mod">
+          <ac:chgData name="Fatima Pillosu" userId="a6295d4dc9e22643" providerId="LiveId" clId="{87453732-75AC-4426-B5D3-B7C69C2D4F54}" dt="2026-01-26T21:38:49.320" v="232" actId="1035"/>
           <ac:cxnSpMkLst>
             <pc:docMk/>
             <pc:sldMk cId="4122425894" sldId="256"/>
             <ac:cxnSpMk id="59" creationId="{AD6740C4-8017-5FFD-0606-09F8D1F34D0B}"/>
           </ac:cxnSpMkLst>
         </pc:cxnChg>
-        <pc:cxnChg chg="add mod">
-          <ac:chgData name="Fatima Pillosu" userId="a6295d4dc9e22643" providerId="LiveId" clId="{81937EDE-744E-40B0-955C-4DD4FF246C01}" dt="2025-05-24T15:31:58.647" v="738" actId="1035"/>
+        <pc:cxnChg chg="mod">
+          <ac:chgData name="Fatima Pillosu" userId="a6295d4dc9e22643" providerId="LiveId" clId="{87453732-75AC-4426-B5D3-B7C69C2D4F54}" dt="2026-01-26T21:38:55.887" v="237" actId="1035"/>
           <ac:cxnSpMkLst>
             <pc:docMk/>
             <pc:sldMk cId="4122425894" sldId="256"/>
             <ac:cxnSpMk id="62" creationId="{F5E507EC-962B-1DDE-4A65-9A73030AEBD2}"/>
           </ac:cxnSpMkLst>
         </pc:cxnChg>
-        <pc:cxnChg chg="add mod">
-          <ac:chgData name="Fatima Pillosu" userId="a6295d4dc9e22643" providerId="LiveId" clId="{81937EDE-744E-40B0-955C-4DD4FF246C01}" dt="2025-05-24T15:31:58.647" v="738" actId="1035"/>
-          <ac:cxnSpMkLst>
-            <pc:docMk/>
-            <pc:sldMk cId="4122425894" sldId="256"/>
-            <ac:cxnSpMk id="65" creationId="{BA97DBDE-68A6-45C7-9371-3403BDA130BE}"/>
-          </ac:cxnSpMkLst>
-        </pc:cxnChg>
-        <pc:cxnChg chg="add mod">
-          <ac:chgData name="Fatima Pillosu" userId="a6295d4dc9e22643" providerId="LiveId" clId="{81937EDE-744E-40B0-955C-4DD4FF246C01}" dt="2025-05-24T15:31:58.647" v="738" actId="1035"/>
-          <ac:cxnSpMkLst>
-            <pc:docMk/>
-            <pc:sldMk cId="4122425894" sldId="256"/>
-            <ac:cxnSpMk id="68" creationId="{FAFB569D-EC0A-7B26-3CCE-FE69C05ED435}"/>
-          </ac:cxnSpMkLst>
-        </pc:cxnChg>
-        <pc:cxnChg chg="add mod">
-          <ac:chgData name="Fatima Pillosu" userId="a6295d4dc9e22643" providerId="LiveId" clId="{81937EDE-744E-40B0-955C-4DD4FF246C01}" dt="2025-05-25T06:58:47.281" v="1190" actId="208"/>
+        <pc:cxnChg chg="mod">
+          <ac:chgData name="Fatima Pillosu" userId="a6295d4dc9e22643" providerId="LiveId" clId="{87453732-75AC-4426-B5D3-B7C69C2D4F54}" dt="2026-01-26T21:38:55.887" v="237" actId="1035"/>
           <ac:cxnSpMkLst>
             <pc:docMk/>
             <pc:sldMk cId="4122425894" sldId="256"/>
@@ -976,7 +608,7 @@
           <a:p>
             <a:fld id="{FF0CBA55-D2F2-4C82-92C8-E6A26451A549}" type="datetimeFigureOut">
               <a:rPr lang="en-GB" smtClean="0"/>
-              <a:t>25/05/2025</a:t>
+              <a:t>26/01/2026</a:t>
             </a:fld>
             <a:endParaRPr lang="en-GB"/>
           </a:p>
@@ -1146,7 +778,7 @@
           <a:p>
             <a:fld id="{FF0CBA55-D2F2-4C82-92C8-E6A26451A549}" type="datetimeFigureOut">
               <a:rPr lang="en-GB" smtClean="0"/>
-              <a:t>25/05/2025</a:t>
+              <a:t>26/01/2026</a:t>
             </a:fld>
             <a:endParaRPr lang="en-GB"/>
           </a:p>
@@ -1326,7 +958,7 @@
           <a:p>
             <a:fld id="{FF0CBA55-D2F2-4C82-92C8-E6A26451A549}" type="datetimeFigureOut">
               <a:rPr lang="en-GB" smtClean="0"/>
-              <a:t>25/05/2025</a:t>
+              <a:t>26/01/2026</a:t>
             </a:fld>
             <a:endParaRPr lang="en-GB"/>
           </a:p>
@@ -1496,7 +1128,7 @@
           <a:p>
             <a:fld id="{FF0CBA55-D2F2-4C82-92C8-E6A26451A549}" type="datetimeFigureOut">
               <a:rPr lang="en-GB" smtClean="0"/>
-              <a:t>25/05/2025</a:t>
+              <a:t>26/01/2026</a:t>
             </a:fld>
             <a:endParaRPr lang="en-GB"/>
           </a:p>
@@ -1742,7 +1374,7 @@
           <a:p>
             <a:fld id="{FF0CBA55-D2F2-4C82-92C8-E6A26451A549}" type="datetimeFigureOut">
               <a:rPr lang="en-GB" smtClean="0"/>
-              <a:t>25/05/2025</a:t>
+              <a:t>26/01/2026</a:t>
             </a:fld>
             <a:endParaRPr lang="en-GB"/>
           </a:p>
@@ -1974,7 +1606,7 @@
           <a:p>
             <a:fld id="{FF0CBA55-D2F2-4C82-92C8-E6A26451A549}" type="datetimeFigureOut">
               <a:rPr lang="en-GB" smtClean="0"/>
-              <a:t>25/05/2025</a:t>
+              <a:t>26/01/2026</a:t>
             </a:fld>
             <a:endParaRPr lang="en-GB"/>
           </a:p>
@@ -2341,7 +1973,7 @@
           <a:p>
             <a:fld id="{FF0CBA55-D2F2-4C82-92C8-E6A26451A549}" type="datetimeFigureOut">
               <a:rPr lang="en-GB" smtClean="0"/>
-              <a:t>25/05/2025</a:t>
+              <a:t>26/01/2026</a:t>
             </a:fld>
             <a:endParaRPr lang="en-GB"/>
           </a:p>
@@ -2459,7 +2091,7 @@
           <a:p>
             <a:fld id="{FF0CBA55-D2F2-4C82-92C8-E6A26451A549}" type="datetimeFigureOut">
               <a:rPr lang="en-GB" smtClean="0"/>
-              <a:t>25/05/2025</a:t>
+              <a:t>26/01/2026</a:t>
             </a:fld>
             <a:endParaRPr lang="en-GB"/>
           </a:p>
@@ -2554,7 +2186,7 @@
           <a:p>
             <a:fld id="{FF0CBA55-D2F2-4C82-92C8-E6A26451A549}" type="datetimeFigureOut">
               <a:rPr lang="en-GB" smtClean="0"/>
-              <a:t>25/05/2025</a:t>
+              <a:t>26/01/2026</a:t>
             </a:fld>
             <a:endParaRPr lang="en-GB"/>
           </a:p>
@@ -2831,7 +2463,7 @@
           <a:p>
             <a:fld id="{FF0CBA55-D2F2-4C82-92C8-E6A26451A549}" type="datetimeFigureOut">
               <a:rPr lang="en-GB" smtClean="0"/>
-              <a:t>25/05/2025</a:t>
+              <a:t>26/01/2026</a:t>
             </a:fld>
             <a:endParaRPr lang="en-GB"/>
           </a:p>
@@ -3088,7 +2720,7 @@
           <a:p>
             <a:fld id="{FF0CBA55-D2F2-4C82-92C8-E6A26451A549}" type="datetimeFigureOut">
               <a:rPr lang="en-GB" smtClean="0"/>
-              <a:t>25/05/2025</a:t>
+              <a:t>26/01/2026</a:t>
             </a:fld>
             <a:endParaRPr lang="en-GB"/>
           </a:p>
@@ -3301,7 +2933,7 @@
           <a:p>
             <a:fld id="{FF0CBA55-D2F2-4C82-92C8-E6A26451A549}" type="datetimeFigureOut">
               <a:rPr lang="en-GB" smtClean="0"/>
-              <a:t>25/05/2025</a:t>
+              <a:t>26/01/2026</a:t>
             </a:fld>
             <a:endParaRPr lang="en-GB"/>
           </a:p>
@@ -3706,6 +3338,43 @@
           <a:chExt cx="0" cy="0"/>
         </a:xfrm>
       </p:grpSpPr>
+      <p:pic>
+        <p:nvPicPr>
+          <p:cNvPr id="54" name="Picture 53" descr="A graph of different colored lines&#10;&#10;AI-generated content may be incorrect.">
+            <a:extLst>
+              <a:ext uri="{FF2B5EF4-FFF2-40B4-BE49-F238E27FC236}">
+                <a16:creationId xmlns:a16="http://schemas.microsoft.com/office/drawing/2014/main" id="{54CBA38D-727F-0A78-5908-70994BD3CBC0}"/>
+              </a:ext>
+            </a:extLst>
+          </p:cNvPr>
+          <p:cNvPicPr>
+            <a:picLocks noChangeAspect="1"/>
+          </p:cNvPicPr>
+          <p:nvPr/>
+        </p:nvPicPr>
+        <p:blipFill>
+          <a:blip r:embed="rId2">
+            <a:extLst>
+              <a:ext uri="{28A0092B-C50C-407E-A947-70E740481C1C}">
+                <a14:useLocalDpi xmlns:a14="http://schemas.microsoft.com/office/drawing/2010/main" val="0"/>
+              </a:ext>
+            </a:extLst>
+          </a:blip>
+          <a:srcRect l="6082" t="10341" r="9269" b="2111"/>
+          <a:stretch>
+            <a:fillRect/>
+          </a:stretch>
+        </p:blipFill>
+        <p:spPr>
+          <a:xfrm>
+            <a:off x="2306247" y="993950"/>
+            <a:ext cx="1811885" cy="1873928"/>
+          </a:xfrm>
+          <a:prstGeom prst="rect">
+            <a:avLst/>
+          </a:prstGeom>
+        </p:spPr>
+      </p:pic>
       <p:sp>
         <p:nvSpPr>
           <p:cNvPr id="52" name="Rectangle 51">
@@ -3720,7 +3389,7 @@
         </p:nvSpPr>
         <p:spPr>
           <a:xfrm>
-            <a:off x="478633" y="427362"/>
+            <a:off x="478633" y="372840"/>
             <a:ext cx="360000" cy="90000"/>
           </a:xfrm>
           <a:prstGeom prst="rect">
@@ -3770,41 +3439,6 @@
             <a:extLst>
               <a:ext uri="{FF2B5EF4-FFF2-40B4-BE49-F238E27FC236}">
                 <a16:creationId xmlns:a16="http://schemas.microsoft.com/office/drawing/2014/main" id="{F7615811-68D1-CD2F-E5CC-DBD3BB7955D0}"/>
-              </a:ext>
-            </a:extLst>
-          </p:cNvPr>
-          <p:cNvPicPr>
-            <a:picLocks noChangeAspect="1"/>
-          </p:cNvPicPr>
-          <p:nvPr/>
-        </p:nvPicPr>
-        <p:blipFill>
-          <a:blip r:embed="rId2">
-            <a:extLst>
-              <a:ext uri="{28A0092B-C50C-407E-A947-70E740481C1C}">
-                <a14:useLocalDpi xmlns:a14="http://schemas.microsoft.com/office/drawing/2010/main" val="0"/>
-              </a:ext>
-            </a:extLst>
-          </a:blip>
-          <a:srcRect l="1592" t="10341" r="9269" b="2111"/>
-          <a:stretch/>
-        </p:blipFill>
-        <p:spPr>
-          <a:xfrm>
-            <a:off x="30958" y="884883"/>
-            <a:ext cx="2016000" cy="1980000"/>
-          </a:xfrm>
-          <a:prstGeom prst="rect">
-            <a:avLst/>
-          </a:prstGeom>
-        </p:spPr>
-      </p:pic>
-      <p:pic>
-        <p:nvPicPr>
-          <p:cNvPr id="54" name="Picture 53" descr="A graph of different colored lines&#10;&#10;AI-generated content may be incorrect.">
-            <a:extLst>
-              <a:ext uri="{FF2B5EF4-FFF2-40B4-BE49-F238E27FC236}">
-                <a16:creationId xmlns:a16="http://schemas.microsoft.com/office/drawing/2014/main" id="{54CBA38D-727F-0A78-5908-70994BD3CBC0}"/>
               </a:ext>
             </a:extLst>
           </p:cNvPr>
@@ -3826,8 +3460,8 @@
         </p:blipFill>
         <p:spPr>
           <a:xfrm>
-            <a:off x="2130446" y="884883"/>
-            <a:ext cx="2016000" cy="1980000"/>
+            <a:off x="72898" y="993950"/>
+            <a:ext cx="1908000" cy="1873928"/>
           </a:xfrm>
           <a:prstGeom prst="rect">
             <a:avLst/>
@@ -3849,7 +3483,7 @@
         <p:spPr>
           <a:xfrm>
             <a:off x="-66675" y="-69347"/>
-            <a:ext cx="4206875" cy="430887"/>
+            <a:ext cx="4206875" cy="400110"/>
           </a:xfrm>
           <a:prstGeom prst="rect">
             <a:avLst/>
@@ -3863,7 +3497,7 @@
           <a:lstStyle/>
           <a:p>
             <a:r>
-              <a:rPr lang="en-US" sz="1200" b="1" dirty="0">
+              <a:rPr lang="en-US" sz="1000" b="1" dirty="0">
                 <a:solidFill>
                   <a:srgbClr val="333333"/>
                 </a:solidFill>
@@ -3882,27 +3516,7 @@
                 <a:latin typeface="Calibri Light" panose="020F0302020204030204" pitchFamily="34" charset="0"/>
                 <a:cs typeface="Calibri Light" panose="020F0302020204030204" pitchFamily="34" charset="0"/>
               </a:rPr>
-              <a:t>(a) </a:t>
-            </a:r>
-            <a:r>
-              <a:rPr lang="en-US" sz="1000">
-                <a:solidFill>
-                  <a:srgbClr val="333333"/>
-                </a:solidFill>
-                <a:latin typeface="Calibri Light" panose="020F0302020204030204" pitchFamily="34" charset="0"/>
-                <a:cs typeface="Calibri Light" panose="020F0302020204030204" pitchFamily="34" charset="0"/>
-              </a:rPr>
-              <a:t>Frequency bias </a:t>
-            </a:r>
-            <a:r>
-              <a:rPr lang="en-US" sz="1000" dirty="0">
-                <a:solidFill>
-                  <a:srgbClr val="333333"/>
-                </a:solidFill>
-                <a:latin typeface="Calibri Light" panose="020F0302020204030204" pitchFamily="34" charset="0"/>
-                <a:cs typeface="Calibri Light" panose="020F0302020204030204" pitchFamily="34" charset="0"/>
-              </a:rPr>
-              <a:t>and (b) Area under the ROC curve</a:t>
+              <a:t>Frequency bias (FB) and Area under the ROC curve (AUC-ROC)</a:t>
             </a:r>
             <a:endParaRPr lang="en-GB" sz="1000" dirty="0">
               <a:solidFill>
@@ -3930,7 +3544,7 @@
         </p:nvCxnSpPr>
         <p:spPr>
           <a:xfrm>
-            <a:off x="478633" y="472362"/>
+            <a:off x="478633" y="417840"/>
             <a:ext cx="360000" cy="0"/>
           </a:xfrm>
           <a:prstGeom prst="line">
@@ -3971,7 +3585,7 @@
         </p:nvSpPr>
         <p:spPr>
           <a:xfrm>
-            <a:off x="787580" y="364640"/>
+            <a:off x="787580" y="310118"/>
             <a:ext cx="1373678" cy="215444"/>
           </a:xfrm>
           <a:prstGeom prst="rect">
@@ -4019,7 +3633,7 @@
         </p:nvSpPr>
         <p:spPr>
           <a:xfrm>
-            <a:off x="478633" y="579690"/>
+            <a:off x="478633" y="504198"/>
             <a:ext cx="360000" cy="90000"/>
           </a:xfrm>
           <a:prstGeom prst="rect">
@@ -4079,7 +3693,7 @@
         </p:nvCxnSpPr>
         <p:spPr>
           <a:xfrm>
-            <a:off x="478633" y="624690"/>
+            <a:off x="478633" y="549198"/>
             <a:ext cx="360000" cy="0"/>
           </a:xfrm>
           <a:prstGeom prst="line">
@@ -4120,7 +3734,7 @@
         </p:nvSpPr>
         <p:spPr>
           <a:xfrm>
-            <a:off x="787580" y="516968"/>
+            <a:off x="787580" y="441476"/>
             <a:ext cx="1244275" cy="215444"/>
           </a:xfrm>
           <a:prstGeom prst="rect">
@@ -4168,7 +3782,7 @@
         </p:nvSpPr>
         <p:spPr>
           <a:xfrm>
-            <a:off x="478633" y="732161"/>
+            <a:off x="478633" y="635699"/>
             <a:ext cx="360000" cy="90000"/>
           </a:xfrm>
           <a:prstGeom prst="rect">
@@ -4224,7 +3838,7 @@
         </p:nvCxnSpPr>
         <p:spPr>
           <a:xfrm>
-            <a:off x="478633" y="777161"/>
+            <a:off x="478633" y="680699"/>
             <a:ext cx="360000" cy="0"/>
           </a:xfrm>
           <a:prstGeom prst="line">
@@ -4265,7 +3879,7 @@
         </p:nvSpPr>
         <p:spPr>
           <a:xfrm>
-            <a:off x="787580" y="669439"/>
+            <a:off x="787580" y="572977"/>
             <a:ext cx="1244275" cy="215444"/>
           </a:xfrm>
           <a:prstGeom prst="rect">
@@ -4313,7 +3927,7 @@
         </p:nvSpPr>
         <p:spPr>
           <a:xfrm>
-            <a:off x="2278858" y="427362"/>
+            <a:off x="2278858" y="372840"/>
             <a:ext cx="360000" cy="90000"/>
           </a:xfrm>
           <a:prstGeom prst="rect">
@@ -4373,7 +3987,7 @@
         </p:nvCxnSpPr>
         <p:spPr>
           <a:xfrm>
-            <a:off x="2278858" y="472362"/>
+            <a:off x="2278858" y="417840"/>
             <a:ext cx="360000" cy="0"/>
           </a:xfrm>
           <a:prstGeom prst="line">
@@ -4414,7 +4028,7 @@
         </p:nvSpPr>
         <p:spPr>
           <a:xfrm>
-            <a:off x="2587805" y="364640"/>
+            <a:off x="2587805" y="310118"/>
             <a:ext cx="1244275" cy="215444"/>
           </a:xfrm>
           <a:prstGeom prst="rect">
@@ -4462,7 +4076,7 @@
         </p:nvSpPr>
         <p:spPr>
           <a:xfrm>
-            <a:off x="2278858" y="579690"/>
+            <a:off x="2278858" y="504198"/>
             <a:ext cx="360000" cy="90000"/>
           </a:xfrm>
           <a:prstGeom prst="rect">
@@ -4522,7 +4136,7 @@
         </p:nvCxnSpPr>
         <p:spPr>
           <a:xfrm>
-            <a:off x="2278858" y="624690"/>
+            <a:off x="2278858" y="549198"/>
             <a:ext cx="360000" cy="0"/>
           </a:xfrm>
           <a:prstGeom prst="line">
@@ -4563,7 +4177,7 @@
         </p:nvSpPr>
         <p:spPr>
           <a:xfrm>
-            <a:off x="2587805" y="516968"/>
+            <a:off x="2587805" y="441476"/>
             <a:ext cx="1244275" cy="215444"/>
           </a:xfrm>
           <a:prstGeom prst="rect">
@@ -4611,7 +4225,7 @@
         </p:nvSpPr>
         <p:spPr>
           <a:xfrm>
-            <a:off x="2278858" y="732161"/>
+            <a:off x="2278858" y="635699"/>
             <a:ext cx="360000" cy="90000"/>
           </a:xfrm>
           <a:prstGeom prst="rect">
@@ -4671,7 +4285,7 @@
         </p:nvCxnSpPr>
         <p:spPr>
           <a:xfrm>
-            <a:off x="2278858" y="777161"/>
+            <a:off x="2278858" y="680699"/>
             <a:ext cx="360000" cy="0"/>
           </a:xfrm>
           <a:prstGeom prst="line">
@@ -4712,7 +4326,7 @@
         </p:nvSpPr>
         <p:spPr>
           <a:xfrm>
-            <a:off x="2587805" y="669439"/>
+            <a:off x="2587805" y="572977"/>
             <a:ext cx="1244275" cy="215444"/>
           </a:xfrm>
           <a:prstGeom prst="rect">
@@ -4737,114 +4351,6 @@
               <a:t>100-year return period</a:t>
             </a:r>
             <a:endParaRPr lang="en-GB" sz="800" dirty="0">
-              <a:solidFill>
-                <a:srgbClr val="333333"/>
-              </a:solidFill>
-              <a:latin typeface="Calibri Light" panose="020F0302020204030204" pitchFamily="34" charset="0"/>
-              <a:cs typeface="Calibri Light" panose="020F0302020204030204" pitchFamily="34" charset="0"/>
-            </a:endParaRPr>
-          </a:p>
-        </p:txBody>
-      </p:sp>
-      <p:sp>
-        <p:nvSpPr>
-          <p:cNvPr id="73" name="TextBox 72">
-            <a:extLst>
-              <a:ext uri="{FF2B5EF4-FFF2-40B4-BE49-F238E27FC236}">
-                <a16:creationId xmlns:a16="http://schemas.microsoft.com/office/drawing/2014/main" id="{C128B50E-D96D-2132-A672-13E1B744C2FB}"/>
-              </a:ext>
-            </a:extLst>
-          </p:cNvPr>
-          <p:cNvSpPr txBox="1"/>
-          <p:nvPr/>
-        </p:nvSpPr>
-        <p:spPr>
-          <a:xfrm>
-            <a:off x="1722686" y="1343555"/>
-            <a:ext cx="244800" cy="246221"/>
-          </a:xfrm>
-          <a:prstGeom prst="rect">
-            <a:avLst/>
-          </a:prstGeom>
-          <a:noFill/>
-          <a:ln w="3175">
-            <a:solidFill>
-              <a:srgbClr val="333333"/>
-            </a:solidFill>
-          </a:ln>
-        </p:spPr>
-        <p:txBody>
-          <a:bodyPr wrap="square" rtlCol="0">
-            <a:spAutoFit/>
-          </a:bodyPr>
-          <a:lstStyle/>
-          <a:p>
-            <a:pPr algn="ctr"/>
-            <a:r>
-              <a:rPr lang="en-US" sz="1000" dirty="0">
-                <a:solidFill>
-                  <a:srgbClr val="333333"/>
-                </a:solidFill>
-                <a:latin typeface="Calibri Light" panose="020F0302020204030204" pitchFamily="34" charset="0"/>
-                <a:cs typeface="Calibri Light" panose="020F0302020204030204" pitchFamily="34" charset="0"/>
-              </a:rPr>
-              <a:t>a</a:t>
-            </a:r>
-            <a:endParaRPr lang="en-GB" sz="1000" dirty="0">
-              <a:solidFill>
-                <a:srgbClr val="333333"/>
-              </a:solidFill>
-              <a:latin typeface="Calibri Light" panose="020F0302020204030204" pitchFamily="34" charset="0"/>
-              <a:cs typeface="Calibri Light" panose="020F0302020204030204" pitchFamily="34" charset="0"/>
-            </a:endParaRPr>
-          </a:p>
-        </p:txBody>
-      </p:sp>
-      <p:sp>
-        <p:nvSpPr>
-          <p:cNvPr id="74" name="TextBox 73">
-            <a:extLst>
-              <a:ext uri="{FF2B5EF4-FFF2-40B4-BE49-F238E27FC236}">
-                <a16:creationId xmlns:a16="http://schemas.microsoft.com/office/drawing/2014/main" id="{3BD3CE7A-AEE9-D963-4344-84BC8740B771}"/>
-              </a:ext>
-            </a:extLst>
-          </p:cNvPr>
-          <p:cNvSpPr txBox="1"/>
-          <p:nvPr/>
-        </p:nvSpPr>
-        <p:spPr>
-          <a:xfrm>
-            <a:off x="3814455" y="987133"/>
-            <a:ext cx="244800" cy="246221"/>
-          </a:xfrm>
-          <a:prstGeom prst="rect">
-            <a:avLst/>
-          </a:prstGeom>
-          <a:noFill/>
-          <a:ln w="3175">
-            <a:solidFill>
-              <a:srgbClr val="333333"/>
-            </a:solidFill>
-          </a:ln>
-        </p:spPr>
-        <p:txBody>
-          <a:bodyPr wrap="square" rtlCol="0">
-            <a:spAutoFit/>
-          </a:bodyPr>
-          <a:lstStyle/>
-          <a:p>
-            <a:pPr algn="ctr"/>
-            <a:r>
-              <a:rPr lang="en-US" sz="1000" dirty="0">
-                <a:solidFill>
-                  <a:srgbClr val="333333"/>
-                </a:solidFill>
-                <a:latin typeface="Calibri Light" panose="020F0302020204030204" pitchFamily="34" charset="0"/>
-                <a:cs typeface="Calibri Light" panose="020F0302020204030204" pitchFamily="34" charset="0"/>
-              </a:rPr>
-              <a:t>b</a:t>
-            </a:r>
-            <a:endParaRPr lang="en-GB" sz="1000" dirty="0">
               <a:solidFill>
                 <a:srgbClr val="333333"/>
               </a:solidFill>
@@ -4881,7 +4387,7 @@
         </p:blipFill>
         <p:spPr>
           <a:xfrm>
-            <a:off x="559035" y="1314285"/>
+            <a:off x="600975" y="1423352"/>
             <a:ext cx="881078" cy="764816"/>
           </a:xfrm>
           <a:prstGeom prst="rect">
@@ -4903,7 +4409,7 @@
         </p:nvSpPr>
         <p:spPr>
           <a:xfrm>
-            <a:off x="514978" y="2034438"/>
+            <a:off x="556918" y="2143505"/>
             <a:ext cx="158684" cy="184666"/>
           </a:xfrm>
           <a:prstGeom prst="rect">
@@ -4952,7 +4458,7 @@
         </p:nvSpPr>
         <p:spPr>
           <a:xfrm>
-            <a:off x="678742" y="2034438"/>
+            <a:off x="720682" y="2143505"/>
             <a:ext cx="158684" cy="184666"/>
           </a:xfrm>
           <a:prstGeom prst="rect">
@@ -5001,7 +4507,7 @@
         </p:nvSpPr>
         <p:spPr>
           <a:xfrm>
-            <a:off x="842506" y="2034438"/>
+            <a:off x="884446" y="2143505"/>
             <a:ext cx="158684" cy="184666"/>
           </a:xfrm>
           <a:prstGeom prst="rect">
@@ -5050,7 +4556,7 @@
         </p:nvSpPr>
         <p:spPr>
           <a:xfrm>
-            <a:off x="1006270" y="2034438"/>
+            <a:off x="1048210" y="2143505"/>
             <a:ext cx="158684" cy="184666"/>
           </a:xfrm>
           <a:prstGeom prst="rect">
@@ -5099,7 +4605,7 @@
         </p:nvSpPr>
         <p:spPr>
           <a:xfrm>
-            <a:off x="1170034" y="2034438"/>
+            <a:off x="1211974" y="2143505"/>
             <a:ext cx="158684" cy="184666"/>
           </a:xfrm>
           <a:prstGeom prst="rect">
@@ -5148,7 +4654,7 @@
         </p:nvSpPr>
         <p:spPr>
           <a:xfrm>
-            <a:off x="1333798" y="2034438"/>
+            <a:off x="1375738" y="2143505"/>
             <a:ext cx="158684" cy="184666"/>
           </a:xfrm>
           <a:prstGeom prst="rect">
@@ -5197,7 +4703,7 @@
         </p:nvSpPr>
         <p:spPr>
           <a:xfrm>
-            <a:off x="376433" y="1872104"/>
+            <a:off x="418373" y="1981171"/>
             <a:ext cx="264208" cy="184666"/>
           </a:xfrm>
           <a:prstGeom prst="rect">
@@ -5246,7 +4752,7 @@
         </p:nvSpPr>
         <p:spPr>
           <a:xfrm>
-            <a:off x="376433" y="1478701"/>
+            <a:off x="418373" y="1587768"/>
             <a:ext cx="264208" cy="184666"/>
           </a:xfrm>
           <a:prstGeom prst="rect">
@@ -5295,7 +4801,7 @@
         </p:nvSpPr>
         <p:spPr>
           <a:xfrm>
-            <a:off x="376433" y="1675403"/>
+            <a:off x="418373" y="1784470"/>
             <a:ext cx="264208" cy="184666"/>
           </a:xfrm>
           <a:prstGeom prst="rect">
@@ -5344,7 +4850,7 @@
         </p:nvSpPr>
         <p:spPr>
           <a:xfrm>
-            <a:off x="376433" y="1281999"/>
+            <a:off x="418373" y="1391066"/>
             <a:ext cx="264208" cy="184666"/>
           </a:xfrm>
           <a:prstGeom prst="rect">
@@ -5393,8 +4899,8 @@
         </p:nvSpPr>
         <p:spPr>
           <a:xfrm>
-            <a:off x="1486966" y="1877077"/>
-            <a:ext cx="600914" cy="276999"/>
+            <a:off x="1425170" y="1847599"/>
+            <a:ext cx="594477" cy="276999"/>
           </a:xfrm>
           <a:prstGeom prst="rect">
             <a:avLst/>
@@ -5448,13 +4954,15 @@
               </a:ext>
             </a:extLst>
           </p:cNvPr>
-          <p:cNvCxnSpPr/>
+          <p:cNvCxnSpPr>
+            <a:cxnSpLocks/>
+          </p:cNvCxnSpPr>
           <p:nvPr/>
         </p:nvCxnSpPr>
         <p:spPr>
           <a:xfrm>
-            <a:off x="1448553" y="2017035"/>
-            <a:ext cx="108000" cy="0"/>
+            <a:off x="1490493" y="2126102"/>
+            <a:ext cx="342497" cy="0"/>
           </a:xfrm>
           <a:prstGeom prst="line">
             <a:avLst/>
@@ -5497,7 +5005,7 @@
         </p:nvCxnSpPr>
         <p:spPr>
           <a:xfrm rot="10800000">
-            <a:off x="30958" y="1187019"/>
+            <a:off x="30958" y="1283504"/>
             <a:ext cx="0" cy="933768"/>
           </a:xfrm>
           <a:prstGeom prst="line">
@@ -5505,8 +5013,9 @@
           </a:prstGeom>
           <a:ln w="3175">
             <a:solidFill>
-              <a:schemeClr val="bg1">
+              <a:schemeClr val="tx1">
                 <a:lumMod val="75000"/>
+                <a:lumOff val="25000"/>
               </a:schemeClr>
             </a:solidFill>
             <a:headEnd type="triangle" w="sm" len="sm"/>
@@ -5541,7 +5050,7 @@
         </p:nvSpPr>
         <p:spPr>
           <a:xfrm rot="16200000">
-            <a:off x="-159185" y="2158764"/>
+            <a:off x="-159185" y="2255249"/>
             <a:ext cx="380285" cy="184666"/>
           </a:xfrm>
           <a:prstGeom prst="rect">
@@ -5558,8 +5067,9 @@
             <a:r>
               <a:rPr lang="en-US" sz="600" dirty="0">
                 <a:solidFill>
-                  <a:schemeClr val="bg1">
+                  <a:schemeClr val="tx1">
                     <a:lumMod val="75000"/>
+                    <a:lumOff val="25000"/>
                   </a:schemeClr>
                 </a:solidFill>
                 <a:latin typeface="Calibri Light" panose="020F0302020204030204" pitchFamily="34" charset="0"/>
@@ -5569,106 +5079,9 @@
             </a:r>
             <a:endParaRPr lang="en-GB" sz="600" dirty="0">
               <a:solidFill>
-                <a:schemeClr val="bg1">
+                <a:schemeClr val="tx1">
                   <a:lumMod val="75000"/>
-                </a:schemeClr>
-              </a:solidFill>
-              <a:latin typeface="Calibri Light" panose="020F0302020204030204" pitchFamily="34" charset="0"/>
-              <a:cs typeface="Calibri Light" panose="020F0302020204030204" pitchFamily="34" charset="0"/>
-            </a:endParaRPr>
-          </a:p>
-        </p:txBody>
-      </p:sp>
-      <p:cxnSp>
-        <p:nvCxnSpPr>
-          <p:cNvPr id="19" name="Straight Connector 18">
-            <a:extLst>
-              <a:ext uri="{FF2B5EF4-FFF2-40B4-BE49-F238E27FC236}">
-                <a16:creationId xmlns:a16="http://schemas.microsoft.com/office/drawing/2014/main" id="{340882ED-88AE-1428-CC8B-4153E0855D86}"/>
-              </a:ext>
-            </a:extLst>
-          </p:cNvPr>
-          <p:cNvCxnSpPr>
-            <a:cxnSpLocks/>
-          </p:cNvCxnSpPr>
-          <p:nvPr/>
-        </p:nvCxnSpPr>
-        <p:spPr>
-          <a:xfrm>
-            <a:off x="2116360" y="1486985"/>
-            <a:ext cx="0" cy="933768"/>
-          </a:xfrm>
-          <a:prstGeom prst="line">
-            <a:avLst/>
-          </a:prstGeom>
-          <a:ln w="3175">
-            <a:solidFill>
-              <a:schemeClr val="bg1">
-                <a:lumMod val="75000"/>
-              </a:schemeClr>
-            </a:solidFill>
-            <a:headEnd type="triangle" w="sm" len="sm"/>
-          </a:ln>
-        </p:spPr>
-        <p:style>
-          <a:lnRef idx="2">
-            <a:schemeClr val="accent1"/>
-          </a:lnRef>
-          <a:fillRef idx="0">
-            <a:schemeClr val="accent1"/>
-          </a:fillRef>
-          <a:effectRef idx="1">
-            <a:schemeClr val="accent1"/>
-          </a:effectRef>
-          <a:fontRef idx="minor">
-            <a:schemeClr val="tx1"/>
-          </a:fontRef>
-        </p:style>
-      </p:cxnSp>
-      <p:sp>
-        <p:nvSpPr>
-          <p:cNvPr id="20" name="TextBox 19">
-            <a:extLst>
-              <a:ext uri="{FF2B5EF4-FFF2-40B4-BE49-F238E27FC236}">
-                <a16:creationId xmlns:a16="http://schemas.microsoft.com/office/drawing/2014/main" id="{A774BF42-470D-0D2F-0E8F-51C3D1A1FEBE}"/>
-              </a:ext>
-            </a:extLst>
-          </p:cNvPr>
-          <p:cNvSpPr txBox="1"/>
-          <p:nvPr/>
-        </p:nvSpPr>
-        <p:spPr>
-          <a:xfrm rot="16200000">
-            <a:off x="1927550" y="1279798"/>
-            <a:ext cx="380285" cy="184666"/>
-          </a:xfrm>
-          <a:prstGeom prst="rect">
-            <a:avLst/>
-          </a:prstGeom>
-          <a:noFill/>
-        </p:spPr>
-        <p:txBody>
-          <a:bodyPr wrap="square" rtlCol="0">
-            <a:spAutoFit/>
-          </a:bodyPr>
-          <a:lstStyle/>
-          <a:p>
-            <a:r>
-              <a:rPr lang="en-US" sz="600" dirty="0">
-                <a:solidFill>
-                  <a:schemeClr val="bg1">
-                    <a:lumMod val="75000"/>
-                  </a:schemeClr>
-                </a:solidFill>
-                <a:latin typeface="Calibri Light" panose="020F0302020204030204" pitchFamily="34" charset="0"/>
-                <a:cs typeface="Calibri Light" panose="020F0302020204030204" pitchFamily="34" charset="0"/>
-              </a:rPr>
-              <a:t>better</a:t>
-            </a:r>
-            <a:endParaRPr lang="en-GB" sz="600" dirty="0">
-              <a:solidFill>
-                <a:schemeClr val="bg1">
-                  <a:lumMod val="75000"/>
+                  <a:lumOff val="25000"/>
                 </a:schemeClr>
               </a:solidFill>
               <a:latin typeface="Calibri Light" panose="020F0302020204030204" pitchFamily="34" charset="0"/>
@@ -5691,7 +5104,7 @@
         </p:nvSpPr>
         <p:spPr>
           <a:xfrm>
-            <a:off x="2366010" y="2357235"/>
+            <a:off x="2366010" y="2466302"/>
             <a:ext cx="1774190" cy="184666"/>
           </a:xfrm>
           <a:prstGeom prst="rect">
@@ -5719,6 +5132,281 @@
           </a:p>
         </p:txBody>
       </p:sp>
+      <p:sp>
+        <p:nvSpPr>
+          <p:cNvPr id="11" name="TextBox 10">
+            <a:extLst>
+              <a:ext uri="{FF2B5EF4-FFF2-40B4-BE49-F238E27FC236}">
+                <a16:creationId xmlns:a16="http://schemas.microsoft.com/office/drawing/2014/main" id="{AED0EFEF-B164-5D7D-C462-3BA20FE07E01}"/>
+              </a:ext>
+            </a:extLst>
+          </p:cNvPr>
+          <p:cNvSpPr txBox="1"/>
+          <p:nvPr/>
+        </p:nvSpPr>
+        <p:spPr>
+          <a:xfrm>
+            <a:off x="-79321" y="776789"/>
+            <a:ext cx="1244275" cy="215444"/>
+          </a:xfrm>
+          <a:prstGeom prst="rect">
+            <a:avLst/>
+          </a:prstGeom>
+          <a:noFill/>
+        </p:spPr>
+        <p:txBody>
+          <a:bodyPr wrap="square" rtlCol="0">
+            <a:spAutoFit/>
+          </a:bodyPr>
+          <a:lstStyle/>
+          <a:p>
+            <a:r>
+              <a:rPr lang="en-US" sz="800" dirty="0">
+                <a:solidFill>
+                  <a:srgbClr val="333333"/>
+                </a:solidFill>
+                <a:latin typeface="Calibri Light" panose="020F0302020204030204" pitchFamily="34" charset="0"/>
+                <a:cs typeface="Calibri Light" panose="020F0302020204030204" pitchFamily="34" charset="0"/>
+              </a:rPr>
+              <a:t>a) Frequency bias</a:t>
+            </a:r>
+            <a:endParaRPr lang="en-GB" sz="800" dirty="0">
+              <a:solidFill>
+                <a:srgbClr val="333333"/>
+              </a:solidFill>
+              <a:latin typeface="Calibri Light" panose="020F0302020204030204" pitchFamily="34" charset="0"/>
+              <a:cs typeface="Calibri Light" panose="020F0302020204030204" pitchFamily="34" charset="0"/>
+            </a:endParaRPr>
+          </a:p>
+        </p:txBody>
+      </p:sp>
+      <p:sp>
+        <p:nvSpPr>
+          <p:cNvPr id="13" name="TextBox 12">
+            <a:extLst>
+              <a:ext uri="{FF2B5EF4-FFF2-40B4-BE49-F238E27FC236}">
+                <a16:creationId xmlns:a16="http://schemas.microsoft.com/office/drawing/2014/main" id="{A9FFF771-21B0-7DFE-70D9-E959CBD2B2D8}"/>
+              </a:ext>
+            </a:extLst>
+          </p:cNvPr>
+          <p:cNvSpPr txBox="1"/>
+          <p:nvPr/>
+        </p:nvSpPr>
+        <p:spPr>
+          <a:xfrm>
+            <a:off x="2025359" y="776789"/>
+            <a:ext cx="2092774" cy="215444"/>
+          </a:xfrm>
+          <a:prstGeom prst="rect">
+            <a:avLst/>
+          </a:prstGeom>
+          <a:noFill/>
+        </p:spPr>
+        <p:txBody>
+          <a:bodyPr wrap="square" rtlCol="0">
+            <a:spAutoFit/>
+          </a:bodyPr>
+          <a:lstStyle/>
+          <a:p>
+            <a:r>
+              <a:rPr lang="en-US" sz="800" dirty="0">
+                <a:solidFill>
+                  <a:srgbClr val="333333"/>
+                </a:solidFill>
+                <a:latin typeface="Calibri Light" panose="020F0302020204030204" pitchFamily="34" charset="0"/>
+                <a:cs typeface="Calibri Light" panose="020F0302020204030204" pitchFamily="34" charset="0"/>
+              </a:rPr>
+              <a:t>b) Area under the ROC curve</a:t>
+            </a:r>
+            <a:endParaRPr lang="en-GB" sz="800" dirty="0">
+              <a:solidFill>
+                <a:srgbClr val="333333"/>
+              </a:solidFill>
+              <a:latin typeface="Calibri Light" panose="020F0302020204030204" pitchFamily="34" charset="0"/>
+              <a:cs typeface="Calibri Light" panose="020F0302020204030204" pitchFamily="34" charset="0"/>
+            </a:endParaRPr>
+          </a:p>
+        </p:txBody>
+      </p:sp>
+      <p:sp>
+        <p:nvSpPr>
+          <p:cNvPr id="25" name="TextBox 24">
+            <a:extLst>
+              <a:ext uri="{FF2B5EF4-FFF2-40B4-BE49-F238E27FC236}">
+                <a16:creationId xmlns:a16="http://schemas.microsoft.com/office/drawing/2014/main" id="{7382BBAC-0F4E-A979-DC59-08506F4D434A}"/>
+              </a:ext>
+            </a:extLst>
+          </p:cNvPr>
+          <p:cNvSpPr txBox="1"/>
+          <p:nvPr/>
+        </p:nvSpPr>
+        <p:spPr>
+          <a:xfrm rot="16200000">
+            <a:off x="1427556" y="1746022"/>
+            <a:ext cx="1692243" cy="184666"/>
+          </a:xfrm>
+          <a:prstGeom prst="rect">
+            <a:avLst/>
+          </a:prstGeom>
+          <a:solidFill>
+            <a:schemeClr val="bg1"/>
+          </a:solidFill>
+        </p:spPr>
+        <p:txBody>
+          <a:bodyPr wrap="square" rtlCol="0">
+            <a:spAutoFit/>
+          </a:bodyPr>
+          <a:lstStyle/>
+          <a:p>
+            <a:pPr algn="ctr"/>
+            <a:r>
+              <a:rPr lang="en-US" sz="600" dirty="0">
+                <a:solidFill>
+                  <a:schemeClr val="tx1">
+                    <a:lumMod val="75000"/>
+                    <a:lumOff val="25000"/>
+                  </a:schemeClr>
+                </a:solidFill>
+                <a:latin typeface="Calibri Light" panose="020F0302020204030204" pitchFamily="34" charset="0"/>
+                <a:cs typeface="Calibri Light" panose="020F0302020204030204" pitchFamily="34" charset="0"/>
+              </a:rPr>
+              <a:t>AUC-ROC [-] </a:t>
+            </a:r>
+            <a:endParaRPr lang="en-GB" sz="600" dirty="0">
+              <a:solidFill>
+                <a:schemeClr val="tx1">
+                  <a:lumMod val="75000"/>
+                  <a:lumOff val="25000"/>
+                </a:schemeClr>
+              </a:solidFill>
+              <a:latin typeface="Calibri Light" panose="020F0302020204030204" pitchFamily="34" charset="0"/>
+              <a:cs typeface="Calibri Light" panose="020F0302020204030204" pitchFamily="34" charset="0"/>
+            </a:endParaRPr>
+          </a:p>
+        </p:txBody>
+      </p:sp>
+      <p:grpSp>
+        <p:nvGrpSpPr>
+          <p:cNvPr id="22" name="Group 21">
+            <a:extLst>
+              <a:ext uri="{FF2B5EF4-FFF2-40B4-BE49-F238E27FC236}">
+                <a16:creationId xmlns:a16="http://schemas.microsoft.com/office/drawing/2014/main" id="{9B681E22-1678-D007-CB99-5A08F5ACD595}"/>
+              </a:ext>
+            </a:extLst>
+          </p:cNvPr>
+          <p:cNvGrpSpPr/>
+          <p:nvPr/>
+        </p:nvGrpSpPr>
+        <p:grpSpPr>
+          <a:xfrm>
+            <a:off x="2086092" y="1178651"/>
+            <a:ext cx="184666" cy="1238765"/>
+            <a:chOff x="2025360" y="1676932"/>
+            <a:chExt cx="184666" cy="1238765"/>
+          </a:xfrm>
+        </p:grpSpPr>
+        <p:cxnSp>
+          <p:nvCxnSpPr>
+            <p:cNvPr id="19" name="Straight Connector 18">
+              <a:extLst>
+                <a:ext uri="{FF2B5EF4-FFF2-40B4-BE49-F238E27FC236}">
+                  <a16:creationId xmlns:a16="http://schemas.microsoft.com/office/drawing/2014/main" id="{340882ED-88AE-1428-CC8B-4153E0855D86}"/>
+                </a:ext>
+              </a:extLst>
+            </p:cNvPr>
+            <p:cNvCxnSpPr>
+              <a:cxnSpLocks/>
+            </p:cNvCxnSpPr>
+            <p:nvPr/>
+          </p:nvCxnSpPr>
+          <p:spPr>
+            <a:xfrm>
+              <a:off x="2116360" y="1981929"/>
+              <a:ext cx="0" cy="933768"/>
+            </a:xfrm>
+            <a:prstGeom prst="line">
+              <a:avLst/>
+            </a:prstGeom>
+            <a:ln w="3175">
+              <a:solidFill>
+                <a:schemeClr val="tx1">
+                  <a:lumMod val="75000"/>
+                  <a:lumOff val="25000"/>
+                </a:schemeClr>
+              </a:solidFill>
+              <a:headEnd type="triangle" w="sm" len="sm"/>
+            </a:ln>
+          </p:spPr>
+          <p:style>
+            <a:lnRef idx="2">
+              <a:schemeClr val="accent1"/>
+            </a:lnRef>
+            <a:fillRef idx="0">
+              <a:schemeClr val="accent1"/>
+            </a:fillRef>
+            <a:effectRef idx="1">
+              <a:schemeClr val="accent1"/>
+            </a:effectRef>
+            <a:fontRef idx="minor">
+              <a:schemeClr val="tx1"/>
+            </a:fontRef>
+          </p:style>
+        </p:cxnSp>
+        <p:sp>
+          <p:nvSpPr>
+            <p:cNvPr id="20" name="TextBox 19">
+              <a:extLst>
+                <a:ext uri="{FF2B5EF4-FFF2-40B4-BE49-F238E27FC236}">
+                  <a16:creationId xmlns:a16="http://schemas.microsoft.com/office/drawing/2014/main" id="{A774BF42-470D-0D2F-0E8F-51C3D1A1FEBE}"/>
+                </a:ext>
+              </a:extLst>
+            </p:cNvPr>
+            <p:cNvSpPr txBox="1"/>
+            <p:nvPr/>
+          </p:nvSpPr>
+          <p:spPr>
+            <a:xfrm rot="16200000">
+              <a:off x="1927550" y="1774742"/>
+              <a:ext cx="380285" cy="184666"/>
+            </a:xfrm>
+            <a:prstGeom prst="rect">
+              <a:avLst/>
+            </a:prstGeom>
+            <a:noFill/>
+          </p:spPr>
+          <p:txBody>
+            <a:bodyPr wrap="square" rtlCol="0">
+              <a:spAutoFit/>
+            </a:bodyPr>
+            <a:lstStyle/>
+            <a:p>
+              <a:r>
+                <a:rPr lang="en-US" sz="600" dirty="0">
+                  <a:solidFill>
+                    <a:schemeClr val="tx1">
+                      <a:lumMod val="75000"/>
+                      <a:lumOff val="25000"/>
+                    </a:schemeClr>
+                  </a:solidFill>
+                  <a:latin typeface="Calibri Light" panose="020F0302020204030204" pitchFamily="34" charset="0"/>
+                  <a:cs typeface="Calibri Light" panose="020F0302020204030204" pitchFamily="34" charset="0"/>
+                </a:rPr>
+                <a:t>better</a:t>
+              </a:r>
+              <a:endParaRPr lang="en-GB" sz="600" dirty="0">
+                <a:solidFill>
+                  <a:schemeClr val="tx1">
+                    <a:lumMod val="75000"/>
+                    <a:lumOff val="25000"/>
+                  </a:schemeClr>
+                </a:solidFill>
+                <a:latin typeface="Calibri Light" panose="020F0302020204030204" pitchFamily="34" charset="0"/>
+                <a:cs typeface="Calibri Light" panose="020F0302020204030204" pitchFamily="34" charset="0"/>
+              </a:endParaRPr>
+            </a:p>
+          </p:txBody>
+        </p:sp>
+      </p:grpSp>
     </p:spTree>
     <p:extLst>
       <p:ext uri="{BB962C8B-B14F-4D97-AF65-F5344CB8AC3E}">

--- a/chapter_05/figures/rainfall_based_ff_verif_overall_scores.pptx
+++ b/chapter_05/figures/rainfall_based_ff_verif_overall_scores.pptx
@@ -115,7 +115,7 @@
 <file path=ppt/revisionInfo.xml><?xml version="1.0" encoding="utf-8"?>
 <p1510:revInfo xmlns:a="http://schemas.openxmlformats.org/drawingml/2006/main" xmlns:r="http://schemas.openxmlformats.org/officeDocument/2006/relationships" xmlns:p1510="http://schemas.microsoft.com/office/powerpoint/2015/10/main">
   <p1510:revLst>
-    <p1510:client id="{9D3BEDD0-040A-4BF7-ABF9-D0FF9D49D355}" v="4" dt="2026-01-26T21:39:49.021"/>
+    <p1510:client id="{9D3BEDD0-040A-4BF7-ABF9-D0FF9D49D355}" v="7" dt="2026-01-26T21:49:16.567"/>
   </p1510:revLst>
 </p1510:revInfo>
 </file>
@@ -125,12 +125,12 @@
   <pc:docChgLst>
     <pc:chgData name="Fatima Pillosu" userId="a6295d4dc9e22643" providerId="LiveId" clId="{87453732-75AC-4426-B5D3-B7C69C2D4F54}"/>
     <pc:docChg chg="custSel modSld">
-      <pc:chgData name="Fatima Pillosu" userId="a6295d4dc9e22643" providerId="LiveId" clId="{87453732-75AC-4426-B5D3-B7C69C2D4F54}" dt="2026-01-26T21:42:02.411" v="302" actId="166"/>
+      <pc:chgData name="Fatima Pillosu" userId="a6295d4dc9e22643" providerId="LiveId" clId="{87453732-75AC-4426-B5D3-B7C69C2D4F54}" dt="2026-01-26T21:49:45.276" v="331" actId="255"/>
       <pc:docMkLst>
         <pc:docMk/>
       </pc:docMkLst>
       <pc:sldChg chg="addSp delSp modSp mod">
-        <pc:chgData name="Fatima Pillosu" userId="a6295d4dc9e22643" providerId="LiveId" clId="{87453732-75AC-4426-B5D3-B7C69C2D4F54}" dt="2026-01-26T21:42:02.411" v="302" actId="166"/>
+        <pc:chgData name="Fatima Pillosu" userId="a6295d4dc9e22643" providerId="LiveId" clId="{87453732-75AC-4426-B5D3-B7C69C2D4F54}" dt="2026-01-26T21:49:45.276" v="331" actId="255"/>
         <pc:sldMkLst>
           <pc:docMk/>
           <pc:sldMk cId="4122425894" sldId="256"/>
@@ -263,6 +263,22 @@
             <ac:spMk id="21" creationId="{FDE335CC-8232-5A7B-BA6B-67F73B52FE52}"/>
           </ac:spMkLst>
         </pc:spChg>
+        <pc:spChg chg="add mod ord">
+          <ac:chgData name="Fatima Pillosu" userId="a6295d4dc9e22643" providerId="LiveId" clId="{87453732-75AC-4426-B5D3-B7C69C2D4F54}" dt="2026-01-26T21:49:45.276" v="331" actId="255"/>
+          <ac:spMkLst>
+            <pc:docMk/>
+            <pc:sldMk cId="4122425894" sldId="256"/>
+            <ac:spMk id="23" creationId="{A0861819-C13A-4211-B3E9-87674CC9E37D}"/>
+          </ac:spMkLst>
+        </pc:spChg>
+        <pc:spChg chg="add mod">
+          <ac:chgData name="Fatima Pillosu" userId="a6295d4dc9e22643" providerId="LiveId" clId="{87453732-75AC-4426-B5D3-B7C69C2D4F54}" dt="2026-01-26T21:48:49.456" v="320" actId="14100"/>
+          <ac:spMkLst>
+            <pc:docMk/>
+            <pc:sldMk cId="4122425894" sldId="256"/>
+            <ac:spMk id="24" creationId="{1F88BE76-F612-4EDE-475B-2CDCA7A4AC03}"/>
+          </ac:spMkLst>
+        </pc:spChg>
         <pc:spChg chg="add del mod">
           <ac:chgData name="Fatima Pillosu" userId="a6295d4dc9e22643" providerId="LiveId" clId="{87453732-75AC-4426-B5D3-B7C69C2D4F54}" dt="2026-01-26T21:37:55.954" v="188" actId="478"/>
           <ac:spMkLst>
@@ -277,6 +293,22 @@
             <pc:docMk/>
             <pc:sldMk cId="4122425894" sldId="256"/>
             <ac:spMk id="25" creationId="{7382BBAC-0F4E-A979-DC59-08506F4D434A}"/>
+          </ac:spMkLst>
+        </pc:spChg>
+        <pc:spChg chg="add mod">
+          <ac:chgData name="Fatima Pillosu" userId="a6295d4dc9e22643" providerId="LiveId" clId="{87453732-75AC-4426-B5D3-B7C69C2D4F54}" dt="2026-01-26T21:49:24.415" v="326" actId="1076"/>
+          <ac:spMkLst>
+            <pc:docMk/>
+            <pc:sldMk cId="4122425894" sldId="256"/>
+            <ac:spMk id="26" creationId="{879D0017-9156-BDB4-636F-ED86CE8CE57C}"/>
+          </ac:spMkLst>
+        </pc:spChg>
+        <pc:spChg chg="add mod">
+          <ac:chgData name="Fatima Pillosu" userId="a6295d4dc9e22643" providerId="LiveId" clId="{87453732-75AC-4426-B5D3-B7C69C2D4F54}" dt="2026-01-26T21:49:36.508" v="329" actId="255"/>
+          <ac:spMkLst>
+            <pc:docMk/>
+            <pc:sldMk cId="4122425894" sldId="256"/>
+            <ac:spMk id="27" creationId="{E88E6EB5-936B-D36B-D075-177C9C23B59D}"/>
           </ac:spMkLst>
         </pc:spChg>
         <pc:spChg chg="mod">
@@ -5407,6 +5439,168 @@
           </p:txBody>
         </p:sp>
       </p:grpSp>
+      <p:sp>
+        <p:nvSpPr>
+          <p:cNvPr id="24" name="TextBox 23">
+            <a:extLst>
+              <a:ext uri="{FF2B5EF4-FFF2-40B4-BE49-F238E27FC236}">
+                <a16:creationId xmlns:a16="http://schemas.microsoft.com/office/drawing/2014/main" id="{1F88BE76-F612-4EDE-475B-2CDCA7A4AC03}"/>
+              </a:ext>
+            </a:extLst>
+          </p:cNvPr>
+          <p:cNvSpPr txBox="1"/>
+          <p:nvPr/>
+        </p:nvSpPr>
+        <p:spPr>
+          <a:xfrm>
+            <a:off x="284056" y="2714875"/>
+            <a:ext cx="134317" cy="153003"/>
+          </a:xfrm>
+          <a:prstGeom prst="rect">
+            <a:avLst/>
+          </a:prstGeom>
+          <a:solidFill>
+            <a:schemeClr val="bg1"/>
+          </a:solidFill>
+        </p:spPr>
+        <p:txBody>
+          <a:bodyPr wrap="square" rtlCol="0">
+            <a:spAutoFit/>
+          </a:bodyPr>
+          <a:lstStyle/>
+          <a:p>
+            <a:endParaRPr lang="en-US" sz="600" dirty="0">
+              <a:solidFill>
+                <a:srgbClr val="333333"/>
+              </a:solidFill>
+              <a:latin typeface="Calibri Light" panose="020F0302020204030204" pitchFamily="34" charset="0"/>
+              <a:cs typeface="Calibri Light" panose="020F0302020204030204" pitchFamily="34" charset="0"/>
+            </a:endParaRPr>
+          </a:p>
+        </p:txBody>
+      </p:sp>
+      <p:sp>
+        <p:nvSpPr>
+          <p:cNvPr id="23" name="TextBox 22">
+            <a:extLst>
+              <a:ext uri="{FF2B5EF4-FFF2-40B4-BE49-F238E27FC236}">
+                <a16:creationId xmlns:a16="http://schemas.microsoft.com/office/drawing/2014/main" id="{A0861819-C13A-4211-B3E9-87674CC9E37D}"/>
+              </a:ext>
+            </a:extLst>
+          </p:cNvPr>
+          <p:cNvSpPr txBox="1"/>
+          <p:nvPr/>
+        </p:nvSpPr>
+        <p:spPr>
+          <a:xfrm>
+            <a:off x="237763" y="2650968"/>
+            <a:ext cx="194577" cy="200055"/>
+          </a:xfrm>
+          <a:prstGeom prst="rect">
+            <a:avLst/>
+          </a:prstGeom>
+          <a:noFill/>
+        </p:spPr>
+        <p:txBody>
+          <a:bodyPr wrap="square" rtlCol="0">
+            <a:spAutoFit/>
+          </a:bodyPr>
+          <a:lstStyle/>
+          <a:p>
+            <a:r>
+              <a:rPr lang="en-US" sz="700" dirty="0">
+                <a:solidFill>
+                  <a:srgbClr val="333333"/>
+                </a:solidFill>
+                <a:latin typeface="Calibri Light" panose="020F0302020204030204" pitchFamily="34" charset="0"/>
+                <a:cs typeface="Calibri Light" panose="020F0302020204030204" pitchFamily="34" charset="0"/>
+              </a:rPr>
+              <a:t>r</a:t>
+            </a:r>
+          </a:p>
+        </p:txBody>
+      </p:sp>
+      <p:sp>
+        <p:nvSpPr>
+          <p:cNvPr id="26" name="TextBox 25">
+            <a:extLst>
+              <a:ext uri="{FF2B5EF4-FFF2-40B4-BE49-F238E27FC236}">
+                <a16:creationId xmlns:a16="http://schemas.microsoft.com/office/drawing/2014/main" id="{879D0017-9156-BDB4-636F-ED86CE8CE57C}"/>
+              </a:ext>
+            </a:extLst>
+          </p:cNvPr>
+          <p:cNvSpPr txBox="1"/>
+          <p:nvPr/>
+        </p:nvSpPr>
+        <p:spPr>
+          <a:xfrm>
+            <a:off x="2418173" y="2708235"/>
+            <a:ext cx="134317" cy="153003"/>
+          </a:xfrm>
+          <a:prstGeom prst="rect">
+            <a:avLst/>
+          </a:prstGeom>
+          <a:solidFill>
+            <a:schemeClr val="bg1"/>
+          </a:solidFill>
+        </p:spPr>
+        <p:txBody>
+          <a:bodyPr wrap="square" rtlCol="0">
+            <a:spAutoFit/>
+          </a:bodyPr>
+          <a:lstStyle/>
+          <a:p>
+            <a:endParaRPr lang="en-US" sz="600" dirty="0">
+              <a:solidFill>
+                <a:srgbClr val="333333"/>
+              </a:solidFill>
+              <a:latin typeface="Calibri Light" panose="020F0302020204030204" pitchFamily="34" charset="0"/>
+              <a:cs typeface="Calibri Light" panose="020F0302020204030204" pitchFamily="34" charset="0"/>
+            </a:endParaRPr>
+          </a:p>
+        </p:txBody>
+      </p:sp>
+      <p:sp>
+        <p:nvSpPr>
+          <p:cNvPr id="27" name="TextBox 26">
+            <a:extLst>
+              <a:ext uri="{FF2B5EF4-FFF2-40B4-BE49-F238E27FC236}">
+                <a16:creationId xmlns:a16="http://schemas.microsoft.com/office/drawing/2014/main" id="{E88E6EB5-936B-D36B-D075-177C9C23B59D}"/>
+              </a:ext>
+            </a:extLst>
+          </p:cNvPr>
+          <p:cNvSpPr txBox="1"/>
+          <p:nvPr/>
+        </p:nvSpPr>
+        <p:spPr>
+          <a:xfrm>
+            <a:off x="2371880" y="2644328"/>
+            <a:ext cx="194577" cy="200055"/>
+          </a:xfrm>
+          <a:prstGeom prst="rect">
+            <a:avLst/>
+          </a:prstGeom>
+          <a:noFill/>
+        </p:spPr>
+        <p:txBody>
+          <a:bodyPr wrap="square" rtlCol="0">
+            <a:spAutoFit/>
+          </a:bodyPr>
+          <a:lstStyle/>
+          <a:p>
+            <a:r>
+              <a:rPr lang="en-US" sz="700" dirty="0">
+                <a:solidFill>
+                  <a:srgbClr val="333333"/>
+                </a:solidFill>
+                <a:latin typeface="Calibri Light" panose="020F0302020204030204" pitchFamily="34" charset="0"/>
+                <a:cs typeface="Calibri Light" panose="020F0302020204030204" pitchFamily="34" charset="0"/>
+              </a:rPr>
+              <a:t>r</a:t>
+            </a:r>
+          </a:p>
+        </p:txBody>
+      </p:sp>
     </p:spTree>
     <p:extLst>
       <p:ext uri="{BB962C8B-B14F-4D97-AF65-F5344CB8AC3E}">

--- a/chapter_05/figures/rainfall_based_ff_verif_overall_scores.pptx
+++ b/chapter_05/figures/rainfall_based_ff_verif_overall_scores.pptx
@@ -125,12 +125,12 @@
   <pc:docChgLst>
     <pc:chgData name="Fatima Pillosu" userId="a6295d4dc9e22643" providerId="LiveId" clId="{87453732-75AC-4426-B5D3-B7C69C2D4F54}"/>
     <pc:docChg chg="custSel modSld">
-      <pc:chgData name="Fatima Pillosu" userId="a6295d4dc9e22643" providerId="LiveId" clId="{87453732-75AC-4426-B5D3-B7C69C2D4F54}" dt="2026-01-26T21:49:45.276" v="331" actId="255"/>
+      <pc:chgData name="Fatima Pillosu" userId="a6295d4dc9e22643" providerId="LiveId" clId="{87453732-75AC-4426-B5D3-B7C69C2D4F54}" dt="2026-01-26T22:22:49.016" v="341" actId="14100"/>
       <pc:docMkLst>
         <pc:docMk/>
       </pc:docMkLst>
       <pc:sldChg chg="addSp delSp modSp mod">
-        <pc:chgData name="Fatima Pillosu" userId="a6295d4dc9e22643" providerId="LiveId" clId="{87453732-75AC-4426-B5D3-B7C69C2D4F54}" dt="2026-01-26T21:49:45.276" v="331" actId="255"/>
+        <pc:chgData name="Fatima Pillosu" userId="a6295d4dc9e22643" providerId="LiveId" clId="{87453732-75AC-4426-B5D3-B7C69C2D4F54}" dt="2026-01-26T22:22:49.016" v="341" actId="14100"/>
         <pc:sldMkLst>
           <pc:docMk/>
           <pc:sldMk cId="4122425894" sldId="256"/>
@@ -256,7 +256,7 @@
           </ac:spMkLst>
         </pc:spChg>
         <pc:spChg chg="mod">
-          <ac:chgData name="Fatima Pillosu" userId="a6295d4dc9e22643" providerId="LiveId" clId="{87453732-75AC-4426-B5D3-B7C69C2D4F54}" dt="2026-01-26T21:34:02.936" v="54" actId="1036"/>
+          <ac:chgData name="Fatima Pillosu" userId="a6295d4dc9e22643" providerId="LiveId" clId="{87453732-75AC-4426-B5D3-B7C69C2D4F54}" dt="2026-01-26T22:22:49.016" v="341" actId="14100"/>
           <ac:spMkLst>
             <pc:docMk/>
             <pc:sldMk cId="4122425894" sldId="256"/>
@@ -5136,8 +5136,8 @@
         </p:nvSpPr>
         <p:spPr>
           <a:xfrm>
-            <a:off x="2366010" y="2466302"/>
-            <a:ext cx="1774190" cy="184666"/>
+            <a:off x="2461264" y="2368594"/>
+            <a:ext cx="1656868" cy="184666"/>
           </a:xfrm>
           <a:prstGeom prst="rect">
             <a:avLst/>
@@ -5159,7 +5159,7 @@
                 <a:latin typeface="Calibri Light" panose="020F0302020204030204" pitchFamily="34" charset="0"/>
                 <a:cs typeface="Calibri Light" panose="020F0302020204030204" pitchFamily="34" charset="0"/>
               </a:rPr>
-              <a:t>AROC = 0.5 (no skill)</a:t>
+              <a:t>AUC-ROC = 0.5 (no skill)</a:t>
             </a:r>
           </a:p>
         </p:txBody>
